--- a/output_pptx/Build_My_Life.pptx
+++ b/output_pptx/Build_My_Life.pptx
@@ -3121,23 +3121,23 @@
         </p:nvSpPr>
         <p:spPr>
           <a:xfrm>
-            <a:off x="594360" y="1837944"/>
-            <a:ext cx="11002975" cy="685800"/>
-          </a:xfrm>
-          <a:prstGeom prst="rect">
-            <a:avLst/>
-          </a:prstGeom>
-          <a:noFill/>
-        </p:spPr>
-        <p:txBody>
-          <a:bodyPr wrap="square">
-            <a:spAutoFit/>
-          </a:bodyPr>
-          <a:lstStyle/>
-          <a:p>
-            <a:pPr algn="ctr"/>
-            <a:r>
-              <a:rPr sz="4400" b="1" i="0">
+            <a:off x="640080" y="1650492"/>
+            <a:ext cx="10911535" cy="731520"/>
+          </a:xfrm>
+          <a:prstGeom prst="rect">
+            <a:avLst/>
+          </a:prstGeom>
+          <a:noFill/>
+        </p:spPr>
+        <p:txBody>
+          <a:bodyPr wrap="square">
+            <a:spAutoFit/>
+          </a:bodyPr>
+          <a:lstStyle/>
+          <a:p>
+            <a:pPr algn="ctr"/>
+            <a:r>
+              <a:rPr sz="4800" b="1" i="0">
                 <a:solidFill>
                   <a:srgbClr val="FFFFFF"/>
                 </a:solidFill>
@@ -3156,8 +3156,8 @@
         </p:nvSpPr>
         <p:spPr>
           <a:xfrm>
-            <a:off x="594360" y="2560320"/>
-            <a:ext cx="11002975" cy="384048"/>
+            <a:off x="640080" y="2418588"/>
+            <a:ext cx="10911535" cy="365760"/>
           </a:xfrm>
           <a:prstGeom prst="rect">
             <a:avLst/>
@@ -3174,7 +3174,7 @@
             <a:r>
               <a:rPr sz="2400" b="0" i="1">
                 <a:solidFill>
-                  <a:srgbClr val="B4B4B4"/>
+                  <a:srgbClr val="AAAAAA"/>
                 </a:solidFill>
                 <a:latin typeface="Arial"/>
               </a:rPr>
@@ -3191,8 +3191,78 @@
         </p:nvSpPr>
         <p:spPr>
           <a:xfrm>
-            <a:off x="594360" y="2980944"/>
-            <a:ext cx="11002975" cy="347472"/>
+            <a:off x="640080" y="2985516"/>
+            <a:ext cx="10911535" cy="731520"/>
+          </a:xfrm>
+          <a:prstGeom prst="rect">
+            <a:avLst/>
+          </a:prstGeom>
+          <a:noFill/>
+        </p:spPr>
+        <p:txBody>
+          <a:bodyPr wrap="square">
+            <a:spAutoFit/>
+          </a:bodyPr>
+          <a:lstStyle/>
+          <a:p>
+            <a:pPr algn="ctr"/>
+            <a:r>
+              <a:rPr sz="4800" b="1" i="0">
+                <a:solidFill>
+                  <a:srgbClr val="FFFFFF"/>
+                </a:solidFill>
+                <a:latin typeface="Arial"/>
+              </a:rPr>
+              <a:t>すべての賛美を合わせても</a:t>
+            </a:r>
+          </a:p>
+        </p:txBody>
+      </p:sp>
+      <p:sp>
+        <p:nvSpPr>
+          <p:cNvPr id="5" name="TextBox 4"/>
+          <p:cNvSpPr txBox="1"/>
+          <p:nvPr/>
+        </p:nvSpPr>
+        <p:spPr>
+          <a:xfrm>
+            <a:off x="640080" y="3753612"/>
+            <a:ext cx="10911535" cy="365760"/>
+          </a:xfrm>
+          <a:prstGeom prst="rect">
+            <a:avLst/>
+          </a:prstGeom>
+          <a:noFill/>
+        </p:spPr>
+        <p:txBody>
+          <a:bodyPr wrap="square">
+            <a:spAutoFit/>
+          </a:bodyPr>
+          <a:lstStyle/>
+          <a:p>
+            <a:pPr algn="ctr"/>
+            <a:r>
+              <a:rPr sz="2400" b="0" i="1">
+                <a:solidFill>
+                  <a:srgbClr val="AAAAAA"/>
+                </a:solidFill>
+                <a:latin typeface="Arial"/>
+              </a:rPr>
+              <a:t>subete no sanbi wo awasetemo</a:t>
+            </a:r>
+          </a:p>
+        </p:txBody>
+      </p:sp>
+      <p:sp>
+        <p:nvSpPr>
+          <p:cNvPr id="6" name="TextBox 5"/>
+          <p:cNvSpPr txBox="1"/>
+          <p:nvPr/>
+        </p:nvSpPr>
+        <p:spPr>
+          <a:xfrm>
+            <a:off x="640080" y="4530852"/>
+            <a:ext cx="10911535" cy="310896"/>
           </a:xfrm>
           <a:prstGeom prst="rect">
             <a:avLst/>
@@ -3209,81 +3279,11 @@
             <a:r>
               <a:rPr sz="2000" b="0" i="1">
                 <a:solidFill>
-                  <a:srgbClr val="8C8C8C"/>
-                </a:solidFill>
-                <a:latin typeface="Arial"/>
-              </a:rPr>
-              <a:t/>
-            </a:r>
-          </a:p>
-        </p:txBody>
-      </p:sp>
-      <p:sp>
-        <p:nvSpPr>
-          <p:cNvPr id="5" name="TextBox 4"/>
-          <p:cNvSpPr txBox="1"/>
-          <p:nvPr/>
-        </p:nvSpPr>
-        <p:spPr>
-          <a:xfrm>
-            <a:off x="594360" y="3529584"/>
-            <a:ext cx="11002975" cy="685800"/>
-          </a:xfrm>
-          <a:prstGeom prst="rect">
-            <a:avLst/>
-          </a:prstGeom>
-          <a:noFill/>
-        </p:spPr>
-        <p:txBody>
-          <a:bodyPr wrap="square">
-            <a:spAutoFit/>
-          </a:bodyPr>
-          <a:lstStyle/>
-          <a:p>
-            <a:pPr algn="ctr"/>
-            <a:r>
-              <a:rPr sz="4400" b="1" i="0">
-                <a:solidFill>
-                  <a:srgbClr val="FFFFFF"/>
-                </a:solidFill>
-                <a:latin typeface="Arial"/>
-              </a:rPr>
-              <a:t>すべての賛美を合わせても</a:t>
-            </a:r>
-          </a:p>
-        </p:txBody>
-      </p:sp>
-      <p:sp>
-        <p:nvSpPr>
-          <p:cNvPr id="6" name="TextBox 5"/>
-          <p:cNvSpPr txBox="1"/>
-          <p:nvPr/>
-        </p:nvSpPr>
-        <p:spPr>
-          <a:xfrm>
-            <a:off x="594360" y="4251960"/>
-            <a:ext cx="11002975" cy="384048"/>
-          </a:xfrm>
-          <a:prstGeom prst="rect">
-            <a:avLst/>
-          </a:prstGeom>
-          <a:noFill/>
-        </p:spPr>
-        <p:txBody>
-          <a:bodyPr wrap="square">
-            <a:spAutoFit/>
-          </a:bodyPr>
-          <a:lstStyle/>
-          <a:p>
-            <a:pPr algn="ctr"/>
-            <a:r>
-              <a:rPr sz="2400" b="0" i="1">
-                <a:solidFill>
-                  <a:srgbClr val="B4B4B4"/>
-                </a:solidFill>
-                <a:latin typeface="Arial"/>
-              </a:rPr>
-              <a:t>subete no sanbi wo awasetemo</a:t>
+                  <a:srgbClr val="828282"/>
+                </a:solidFill>
+                <a:latin typeface="Arial"/>
+              </a:rPr>
+              <a:t>Digno de toda canção que possamos cantar</a:t>
             </a:r>
           </a:p>
         </p:txBody>
@@ -3296,8 +3296,8 @@
         </p:nvSpPr>
         <p:spPr>
           <a:xfrm>
-            <a:off x="594360" y="4672584"/>
-            <a:ext cx="11002975" cy="347472"/>
+            <a:off x="640080" y="4896612"/>
+            <a:ext cx="10911535" cy="310896"/>
           </a:xfrm>
           <a:prstGeom prst="rect">
             <a:avLst/>
@@ -3314,11 +3314,11 @@
             <a:r>
               <a:rPr sz="2000" b="0" i="1">
                 <a:solidFill>
-                  <a:srgbClr val="8C8C8C"/>
-                </a:solidFill>
-                <a:latin typeface="Arial"/>
-              </a:rPr>
-              <a:t/>
+                  <a:srgbClr val="828282"/>
+                </a:solidFill>
+                <a:latin typeface="Arial"/>
+              </a:rPr>
+              <a:t>Digno de todo louvor que possamos oferecer</a:t>
             </a:r>
           </a:p>
         </p:txBody>
@@ -3357,23 +3357,23 @@
         </p:nvSpPr>
         <p:spPr>
           <a:xfrm>
-            <a:off x="594360" y="2258568"/>
-            <a:ext cx="11002975" cy="685800"/>
-          </a:xfrm>
-          <a:prstGeom prst="rect">
-            <a:avLst/>
-          </a:prstGeom>
-          <a:noFill/>
-        </p:spPr>
-        <p:txBody>
-          <a:bodyPr wrap="square">
-            <a:spAutoFit/>
-          </a:bodyPr>
-          <a:lstStyle/>
-          <a:p>
-            <a:pPr algn="ctr"/>
-            <a:r>
-              <a:rPr sz="4400" b="1" i="0">
+            <a:off x="640080" y="2052828"/>
+            <a:ext cx="10911535" cy="731520"/>
+          </a:xfrm>
+          <a:prstGeom prst="rect">
+            <a:avLst/>
+          </a:prstGeom>
+          <a:noFill/>
+        </p:spPr>
+        <p:txBody>
+          <a:bodyPr wrap="square">
+            <a:spAutoFit/>
+          </a:bodyPr>
+          <a:lstStyle/>
+          <a:p>
+            <a:pPr algn="ctr"/>
+            <a:r>
+              <a:rPr sz="4800" b="1" i="0">
                 <a:solidFill>
                   <a:srgbClr val="FFFFFF"/>
                 </a:solidFill>
@@ -3392,29 +3392,29 @@
         </p:nvSpPr>
         <p:spPr>
           <a:xfrm>
-            <a:off x="594360" y="2980944"/>
-            <a:ext cx="11002975" cy="347472"/>
-          </a:xfrm>
-          <a:prstGeom prst="rect">
-            <a:avLst/>
-          </a:prstGeom>
-          <a:noFill/>
-        </p:spPr>
-        <p:txBody>
-          <a:bodyPr wrap="square">
-            <a:spAutoFit/>
-          </a:bodyPr>
-          <a:lstStyle/>
-          <a:p>
-            <a:pPr algn="ctr"/>
-            <a:r>
-              <a:rPr sz="2200" b="0" i="1">
-                <a:solidFill>
-                  <a:srgbClr val="8C8C8C"/>
-                </a:solidFill>
-                <a:latin typeface="Arial"/>
-              </a:rPr>
-              <a:t/>
+            <a:off x="640080" y="2985516"/>
+            <a:ext cx="10911535" cy="731520"/>
+          </a:xfrm>
+          <a:prstGeom prst="rect">
+            <a:avLst/>
+          </a:prstGeom>
+          <a:noFill/>
+        </p:spPr>
+        <p:txBody>
+          <a:bodyPr wrap="square">
+            <a:spAutoFit/>
+          </a:bodyPr>
+          <a:lstStyle/>
+          <a:p>
+            <a:pPr algn="ctr"/>
+            <a:r>
+              <a:rPr sz="4800" b="1" i="0">
+                <a:solidFill>
+                  <a:srgbClr val="FFFFFF"/>
+                </a:solidFill>
+                <a:latin typeface="Arial"/>
+              </a:rPr>
+              <a:t>Mostra-me quem Tu és</a:t>
             </a:r>
           </a:p>
         </p:txBody>
@@ -3427,29 +3427,29 @@
         </p:nvSpPr>
         <p:spPr>
           <a:xfrm>
-            <a:off x="594360" y="3529584"/>
-            <a:ext cx="11002975" cy="685800"/>
-          </a:xfrm>
-          <a:prstGeom prst="rect">
-            <a:avLst/>
-          </a:prstGeom>
-          <a:noFill/>
-        </p:spPr>
-        <p:txBody>
-          <a:bodyPr wrap="square">
-            <a:spAutoFit/>
-          </a:bodyPr>
-          <a:lstStyle/>
-          <a:p>
-            <a:pPr algn="ctr"/>
-            <a:r>
-              <a:rPr sz="4400" b="1" i="0">
-                <a:solidFill>
-                  <a:srgbClr val="FFFFFF"/>
-                </a:solidFill>
-                <a:latin typeface="Arial"/>
-              </a:rPr>
-              <a:t>Mostra-me quem Tu és</a:t>
+            <a:off x="640080" y="4128516"/>
+            <a:ext cx="10911535" cy="310896"/>
+          </a:xfrm>
+          <a:prstGeom prst="rect">
+            <a:avLst/>
+          </a:prstGeom>
+          <a:noFill/>
+        </p:spPr>
+        <p:txBody>
+          <a:bodyPr wrap="square">
+            <a:spAutoFit/>
+          </a:bodyPr>
+          <a:lstStyle/>
+          <a:p>
+            <a:pPr algn="ctr"/>
+            <a:r>
+              <a:rPr sz="2000" b="0" i="0">
+                <a:solidFill>
+                  <a:srgbClr val="828282"/>
+                </a:solidFill>
+                <a:latin typeface="Arial"/>
+              </a:rPr>
+              <a:t>Holy あなただけが唯一の神　私の目 ひらいて</a:t>
             </a:r>
           </a:p>
         </p:txBody>
@@ -3462,29 +3462,29 @@
         </p:nvSpPr>
         <p:spPr>
           <a:xfrm>
-            <a:off x="594360" y="4251960"/>
-            <a:ext cx="11002975" cy="347472"/>
-          </a:xfrm>
-          <a:prstGeom prst="rect">
-            <a:avLst/>
-          </a:prstGeom>
-          <a:noFill/>
-        </p:spPr>
-        <p:txBody>
-          <a:bodyPr wrap="square">
-            <a:spAutoFit/>
-          </a:bodyPr>
-          <a:lstStyle/>
-          <a:p>
-            <a:pPr algn="ctr"/>
-            <a:r>
-              <a:rPr sz="2200" b="0" i="1">
-                <a:solidFill>
-                  <a:srgbClr val="8C8C8C"/>
-                </a:solidFill>
-                <a:latin typeface="Arial"/>
-              </a:rPr>
-              <a:t/>
+            <a:off x="640080" y="4494276"/>
+            <a:ext cx="10911535" cy="310896"/>
+          </a:xfrm>
+          <a:prstGeom prst="rect">
+            <a:avLst/>
+          </a:prstGeom>
+          <a:noFill/>
+        </p:spPr>
+        <p:txBody>
+          <a:bodyPr wrap="square">
+            <a:spAutoFit/>
+          </a:bodyPr>
+          <a:lstStyle/>
+          <a:p>
+            <a:pPr algn="ctr"/>
+            <a:r>
+              <a:rPr sz="2000" b="0" i="0">
+                <a:solidFill>
+                  <a:srgbClr val="828282"/>
+                </a:solidFill>
+                <a:latin typeface="Arial"/>
+              </a:rPr>
+              <a:t>愛  心にあふれ あなたを知る この愛こそあなた</a:t>
             </a:r>
           </a:p>
         </p:txBody>
@@ -3523,23 +3523,23 @@
         </p:nvSpPr>
         <p:spPr>
           <a:xfrm>
-            <a:off x="594360" y="2258568"/>
-            <a:ext cx="11002975" cy="685800"/>
-          </a:xfrm>
-          <a:prstGeom prst="rect">
-            <a:avLst/>
-          </a:prstGeom>
-          <a:noFill/>
-        </p:spPr>
-        <p:txBody>
-          <a:bodyPr wrap="square">
-            <a:spAutoFit/>
-          </a:bodyPr>
-          <a:lstStyle/>
-          <a:p>
-            <a:pPr algn="ctr"/>
-            <a:r>
-              <a:rPr sz="4400" b="1" i="0">
+            <a:off x="640080" y="2052828"/>
+            <a:ext cx="10911535" cy="731520"/>
+          </a:xfrm>
+          <a:prstGeom prst="rect">
+            <a:avLst/>
+          </a:prstGeom>
+          <a:noFill/>
+        </p:spPr>
+        <p:txBody>
+          <a:bodyPr wrap="square">
+            <a:spAutoFit/>
+          </a:bodyPr>
+          <a:lstStyle/>
+          <a:p>
+            <a:pPr algn="ctr"/>
+            <a:r>
+              <a:rPr sz="4800" b="1" i="0">
                 <a:solidFill>
                   <a:srgbClr val="FFFFFF"/>
                 </a:solidFill>
@@ -3558,99 +3558,29 @@
         </p:nvSpPr>
         <p:spPr>
           <a:xfrm>
-            <a:off x="594360" y="2980944"/>
-            <a:ext cx="11002975" cy="347472"/>
-          </a:xfrm>
-          <a:prstGeom prst="rect">
-            <a:avLst/>
-          </a:prstGeom>
-          <a:noFill/>
-        </p:spPr>
-        <p:txBody>
-          <a:bodyPr wrap="square">
-            <a:spAutoFit/>
-          </a:bodyPr>
-          <a:lstStyle/>
-          <a:p>
-            <a:pPr algn="ctr"/>
-            <a:r>
-              <a:rPr sz="2200" b="0" i="1">
-                <a:solidFill>
-                  <a:srgbClr val="8C8C8C"/>
-                </a:solidFill>
-                <a:latin typeface="Arial"/>
-              </a:rPr>
-              <a:t/>
-            </a:r>
-          </a:p>
-        </p:txBody>
-      </p:sp>
-      <p:sp>
-        <p:nvSpPr>
-          <p:cNvPr id="4" name="TextBox 3"/>
-          <p:cNvSpPr txBox="1"/>
-          <p:nvPr/>
-        </p:nvSpPr>
-        <p:spPr>
-          <a:xfrm>
-            <a:off x="594360" y="3529584"/>
-            <a:ext cx="11002975" cy="685800"/>
-          </a:xfrm>
-          <a:prstGeom prst="rect">
-            <a:avLst/>
-          </a:prstGeom>
-          <a:noFill/>
-        </p:spPr>
-        <p:txBody>
-          <a:bodyPr wrap="square">
-            <a:spAutoFit/>
-          </a:bodyPr>
-          <a:lstStyle/>
-          <a:p>
-            <a:pPr algn="ctr"/>
-            <a:r>
-              <a:rPr sz="4400" b="1" i="0">
+            <a:off x="640080" y="2985516"/>
+            <a:ext cx="10911535" cy="731520"/>
+          </a:xfrm>
+          <a:prstGeom prst="rect">
+            <a:avLst/>
+          </a:prstGeom>
+          <a:noFill/>
+        </p:spPr>
+        <p:txBody>
+          <a:bodyPr wrap="square">
+            <a:spAutoFit/>
+          </a:bodyPr>
+          <a:lstStyle/>
+          <a:p>
+            <a:pPr algn="ctr"/>
+            <a:r>
+              <a:rPr sz="4800" b="1" i="0">
                 <a:solidFill>
                   <a:srgbClr val="FFFFFF"/>
                 </a:solidFill>
                 <a:latin typeface="Arial"/>
               </a:rPr>
               <a:t>E guia-me em Teu amor</a:t>
-            </a:r>
-          </a:p>
-        </p:txBody>
-      </p:sp>
-      <p:sp>
-        <p:nvSpPr>
-          <p:cNvPr id="5" name="TextBox 4"/>
-          <p:cNvSpPr txBox="1"/>
-          <p:nvPr/>
-        </p:nvSpPr>
-        <p:spPr>
-          <a:xfrm>
-            <a:off x="594360" y="4251960"/>
-            <a:ext cx="11002975" cy="347472"/>
-          </a:xfrm>
-          <a:prstGeom prst="rect">
-            <a:avLst/>
-          </a:prstGeom>
-          <a:noFill/>
-        </p:spPr>
-        <p:txBody>
-          <a:bodyPr wrap="square">
-            <a:spAutoFit/>
-          </a:bodyPr>
-          <a:lstStyle/>
-          <a:p>
-            <a:pPr algn="ctr"/>
-            <a:r>
-              <a:rPr sz="2200" b="0" i="1">
-                <a:solidFill>
-                  <a:srgbClr val="8C8C8C"/>
-                </a:solidFill>
-                <a:latin typeface="Arial"/>
-              </a:rPr>
-              <a:t/>
             </a:r>
           </a:p>
         </p:txBody>
@@ -3689,23 +3619,23 @@
         </p:nvSpPr>
         <p:spPr>
           <a:xfrm>
-            <a:off x="594360" y="2258568"/>
-            <a:ext cx="11002975" cy="685800"/>
-          </a:xfrm>
-          <a:prstGeom prst="rect">
-            <a:avLst/>
-          </a:prstGeom>
-          <a:noFill/>
-        </p:spPr>
-        <p:txBody>
-          <a:bodyPr wrap="square">
-            <a:spAutoFit/>
-          </a:bodyPr>
-          <a:lstStyle/>
-          <a:p>
-            <a:pPr algn="ctr"/>
-            <a:r>
-              <a:rPr sz="4400" b="1" i="0">
+            <a:off x="640080" y="2052828"/>
+            <a:ext cx="10911535" cy="731520"/>
+          </a:xfrm>
+          <a:prstGeom prst="rect">
+            <a:avLst/>
+          </a:prstGeom>
+          <a:noFill/>
+        </p:spPr>
+        <p:txBody>
+          <a:bodyPr wrap="square">
+            <a:spAutoFit/>
+          </a:bodyPr>
+          <a:lstStyle/>
+          <a:p>
+            <a:pPr algn="ctr"/>
+            <a:r>
+              <a:rPr sz="4800" b="1" i="0">
                 <a:solidFill>
                   <a:srgbClr val="FFFFFF"/>
                 </a:solidFill>
@@ -3724,29 +3654,29 @@
         </p:nvSpPr>
         <p:spPr>
           <a:xfrm>
-            <a:off x="594360" y="2980944"/>
-            <a:ext cx="11002975" cy="347472"/>
-          </a:xfrm>
-          <a:prstGeom prst="rect">
-            <a:avLst/>
-          </a:prstGeom>
-          <a:noFill/>
-        </p:spPr>
-        <p:txBody>
-          <a:bodyPr wrap="square">
-            <a:spAutoFit/>
-          </a:bodyPr>
-          <a:lstStyle/>
-          <a:p>
-            <a:pPr algn="ctr"/>
-            <a:r>
-              <a:rPr sz="2200" b="0" i="1">
-                <a:solidFill>
-                  <a:srgbClr val="8C8C8C"/>
-                </a:solidFill>
-                <a:latin typeface="Arial"/>
-              </a:rPr>
-              <a:t/>
+            <a:off x="640080" y="2985516"/>
+            <a:ext cx="10911535" cy="731520"/>
+          </a:xfrm>
+          <a:prstGeom prst="rect">
+            <a:avLst/>
+          </a:prstGeom>
+          <a:noFill/>
+        </p:spPr>
+        <p:txBody>
+          <a:bodyPr wrap="square">
+            <a:spAutoFit/>
+          </a:bodyPr>
+          <a:lstStyle/>
+          <a:p>
+            <a:pPr algn="ctr"/>
+            <a:r>
+              <a:rPr sz="4800" b="1" i="0">
+                <a:solidFill>
+                  <a:srgbClr val="FFFFFF"/>
+                </a:solidFill>
+                <a:latin typeface="Arial"/>
+              </a:rPr>
+              <a:t>Em Ti somente</a:t>
             </a:r>
           </a:p>
         </p:txBody>
@@ -3759,29 +3689,29 @@
         </p:nvSpPr>
         <p:spPr>
           <a:xfrm>
-            <a:off x="594360" y="3529584"/>
-            <a:ext cx="11002975" cy="685800"/>
-          </a:xfrm>
-          <a:prstGeom prst="rect">
-            <a:avLst/>
-          </a:prstGeom>
-          <a:noFill/>
-        </p:spPr>
-        <p:txBody>
-          <a:bodyPr wrap="square">
-            <a:spAutoFit/>
-          </a:bodyPr>
-          <a:lstStyle/>
-          <a:p>
-            <a:pPr algn="ctr"/>
-            <a:r>
-              <a:rPr sz="4400" b="1" i="0">
-                <a:solidFill>
-                  <a:srgbClr val="FFFFFF"/>
-                </a:solidFill>
-                <a:latin typeface="Arial"/>
-              </a:rPr>
-              <a:t>Em Ti somente</a:t>
+            <a:off x="640080" y="4128516"/>
+            <a:ext cx="10911535" cy="310896"/>
+          </a:xfrm>
+          <a:prstGeom prst="rect">
+            <a:avLst/>
+          </a:prstGeom>
+          <a:noFill/>
+        </p:spPr>
+        <p:txBody>
+          <a:bodyPr wrap="square">
+            <a:spAutoFit/>
+          </a:bodyPr>
+          <a:lstStyle/>
+          <a:p>
+            <a:pPr algn="ctr"/>
+            <a:r>
+              <a:rPr sz="2000" b="0" i="0">
+                <a:solidFill>
+                  <a:srgbClr val="828282"/>
+                </a:solidFill>
+                <a:latin typeface="Arial"/>
+              </a:rPr>
+              <a:t>ゆるぎなき　主の愛　その上に築く</a:t>
             </a:r>
           </a:p>
         </p:txBody>
@@ -3794,29 +3724,29 @@
         </p:nvSpPr>
         <p:spPr>
           <a:xfrm>
-            <a:off x="594360" y="4251960"/>
-            <a:ext cx="11002975" cy="347472"/>
-          </a:xfrm>
-          <a:prstGeom prst="rect">
-            <a:avLst/>
-          </a:prstGeom>
-          <a:noFill/>
-        </p:spPr>
-        <p:txBody>
-          <a:bodyPr wrap="square">
-            <a:spAutoFit/>
-          </a:bodyPr>
-          <a:lstStyle/>
-          <a:p>
-            <a:pPr algn="ctr"/>
-            <a:r>
-              <a:rPr sz="2200" b="0" i="1">
-                <a:solidFill>
-                  <a:srgbClr val="8C8C8C"/>
-                </a:solidFill>
-                <a:latin typeface="Arial"/>
-              </a:rPr>
-              <a:t/>
+            <a:off x="640080" y="4494276"/>
+            <a:ext cx="10911535" cy="310896"/>
+          </a:xfrm>
+          <a:prstGeom prst="rect">
+            <a:avLst/>
+          </a:prstGeom>
+          <a:noFill/>
+        </p:spPr>
+        <p:txBody>
+          <a:bodyPr wrap="square">
+            <a:spAutoFit/>
+          </a:bodyPr>
+          <a:lstStyle/>
+          <a:p>
+            <a:pPr algn="ctr"/>
+            <a:r>
+              <a:rPr sz="2000" b="0" i="0">
+                <a:solidFill>
+                  <a:srgbClr val="828282"/>
+                </a:solidFill>
+                <a:latin typeface="Arial"/>
+              </a:rPr>
+              <a:t>この人生　信仰　私は倒れない (x2)</a:t>
             </a:r>
           </a:p>
         </p:txBody>
@@ -3855,23 +3785,23 @@
         </p:nvSpPr>
         <p:spPr>
           <a:xfrm>
-            <a:off x="594360" y="2258568"/>
-            <a:ext cx="11002975" cy="685800"/>
-          </a:xfrm>
-          <a:prstGeom prst="rect">
-            <a:avLst/>
-          </a:prstGeom>
-          <a:noFill/>
-        </p:spPr>
-        <p:txBody>
-          <a:bodyPr wrap="square">
-            <a:spAutoFit/>
-          </a:bodyPr>
-          <a:lstStyle/>
-          <a:p>
-            <a:pPr algn="ctr"/>
-            <a:r>
-              <a:rPr sz="4400" b="1" i="0">
+            <a:off x="640080" y="2052828"/>
+            <a:ext cx="10911535" cy="731520"/>
+          </a:xfrm>
+          <a:prstGeom prst="rect">
+            <a:avLst/>
+          </a:prstGeom>
+          <a:noFill/>
+        </p:spPr>
+        <p:txBody>
+          <a:bodyPr wrap="square">
+            <a:spAutoFit/>
+          </a:bodyPr>
+          <a:lstStyle/>
+          <a:p>
+            <a:pPr algn="ctr"/>
+            <a:r>
+              <a:rPr sz="4800" b="1" i="0">
                 <a:solidFill>
                   <a:srgbClr val="FFFFFF"/>
                 </a:solidFill>
@@ -3890,99 +3820,29 @@
         </p:nvSpPr>
         <p:spPr>
           <a:xfrm>
-            <a:off x="594360" y="2980944"/>
-            <a:ext cx="11002975" cy="347472"/>
-          </a:xfrm>
-          <a:prstGeom prst="rect">
-            <a:avLst/>
-          </a:prstGeom>
-          <a:noFill/>
-        </p:spPr>
-        <p:txBody>
-          <a:bodyPr wrap="square">
-            <a:spAutoFit/>
-          </a:bodyPr>
-          <a:lstStyle/>
-          <a:p>
-            <a:pPr algn="ctr"/>
-            <a:r>
-              <a:rPr sz="2200" b="0" i="1">
-                <a:solidFill>
-                  <a:srgbClr val="8C8C8C"/>
-                </a:solidFill>
-                <a:latin typeface="Arial"/>
-              </a:rPr>
-              <a:t/>
-            </a:r>
-          </a:p>
-        </p:txBody>
-      </p:sp>
-      <p:sp>
-        <p:nvSpPr>
-          <p:cNvPr id="4" name="TextBox 3"/>
-          <p:cNvSpPr txBox="1"/>
-          <p:nvPr/>
-        </p:nvSpPr>
-        <p:spPr>
-          <a:xfrm>
-            <a:off x="594360" y="3529584"/>
-            <a:ext cx="11002975" cy="685800"/>
-          </a:xfrm>
-          <a:prstGeom prst="rect">
-            <a:avLst/>
-          </a:prstGeom>
-          <a:noFill/>
-        </p:spPr>
-        <p:txBody>
-          <a:bodyPr wrap="square">
-            <a:spAutoFit/>
-          </a:bodyPr>
-          <a:lstStyle/>
-          <a:p>
-            <a:pPr algn="ctr"/>
-            <a:r>
-              <a:rPr sz="4400" b="1" i="0">
+            <a:off x="640080" y="2985516"/>
+            <a:ext cx="10911535" cy="731520"/>
+          </a:xfrm>
+          <a:prstGeom prst="rect">
+            <a:avLst/>
+          </a:prstGeom>
+          <a:noFill/>
+        </p:spPr>
+        <p:txBody>
+          <a:bodyPr wrap="square">
+            <a:spAutoFit/>
+          </a:bodyPr>
+          <a:lstStyle/>
+          <a:p>
+            <a:pPr algn="ctr"/>
+            <a:r>
+              <a:rPr sz="4800" b="1" i="0">
                 <a:solidFill>
                   <a:srgbClr val="FFFFFF"/>
                 </a:solidFill>
                 <a:latin typeface="Arial"/>
               </a:rPr>
               <a:t>Em Ti somente</a:t>
-            </a:r>
-          </a:p>
-        </p:txBody>
-      </p:sp>
-      <p:sp>
-        <p:nvSpPr>
-          <p:cNvPr id="5" name="TextBox 4"/>
-          <p:cNvSpPr txBox="1"/>
-          <p:nvPr/>
-        </p:nvSpPr>
-        <p:spPr>
-          <a:xfrm>
-            <a:off x="594360" y="4251960"/>
-            <a:ext cx="11002975" cy="347472"/>
-          </a:xfrm>
-          <a:prstGeom prst="rect">
-            <a:avLst/>
-          </a:prstGeom>
-          <a:noFill/>
-        </p:spPr>
-        <p:txBody>
-          <a:bodyPr wrap="square">
-            <a:spAutoFit/>
-          </a:bodyPr>
-          <a:lstStyle/>
-          <a:p>
-            <a:pPr algn="ctr"/>
-            <a:r>
-              <a:rPr sz="2200" b="0" i="1">
-                <a:solidFill>
-                  <a:srgbClr val="8C8C8C"/>
-                </a:solidFill>
-                <a:latin typeface="Arial"/>
-              </a:rPr>
-              <a:t/>
             </a:r>
           </a:p>
         </p:txBody>
@@ -4021,23 +3881,23 @@
         </p:nvSpPr>
         <p:spPr>
           <a:xfrm>
-            <a:off x="594360" y="1837944"/>
-            <a:ext cx="11002975" cy="685800"/>
-          </a:xfrm>
-          <a:prstGeom prst="rect">
-            <a:avLst/>
-          </a:prstGeom>
-          <a:noFill/>
-        </p:spPr>
-        <p:txBody>
-          <a:bodyPr wrap="square">
-            <a:spAutoFit/>
-          </a:bodyPr>
-          <a:lstStyle/>
-          <a:p>
-            <a:pPr algn="ctr"/>
-            <a:r>
-              <a:rPr sz="4400" b="1" i="0">
+            <a:off x="640080" y="1650492"/>
+            <a:ext cx="10911535" cy="731520"/>
+          </a:xfrm>
+          <a:prstGeom prst="rect">
+            <a:avLst/>
+          </a:prstGeom>
+          <a:noFill/>
+        </p:spPr>
+        <p:txBody>
+          <a:bodyPr wrap="square">
+            <a:spAutoFit/>
+          </a:bodyPr>
+          <a:lstStyle/>
+          <a:p>
+            <a:pPr algn="ctr"/>
+            <a:r>
+              <a:rPr sz="4800" b="1" i="0">
                 <a:solidFill>
                   <a:srgbClr val="FFFFFF"/>
                 </a:solidFill>
@@ -4056,25 +3916,25 @@
         </p:nvSpPr>
         <p:spPr>
           <a:xfrm>
-            <a:off x="594360" y="2560320"/>
-            <a:ext cx="11002975" cy="384048"/>
-          </a:xfrm>
-          <a:prstGeom prst="rect">
-            <a:avLst/>
-          </a:prstGeom>
-          <a:noFill/>
-        </p:spPr>
-        <p:txBody>
-          <a:bodyPr wrap="square">
-            <a:spAutoFit/>
-          </a:bodyPr>
-          <a:lstStyle/>
-          <a:p>
-            <a:pPr algn="ctr"/>
-            <a:r>
-              <a:rPr sz="1832" b="0" i="1">
-                <a:solidFill>
-                  <a:srgbClr val="B4B4B4"/>
+            <a:off x="640080" y="2418588"/>
+            <a:ext cx="10911535" cy="365760"/>
+          </a:xfrm>
+          <a:prstGeom prst="rect">
+            <a:avLst/>
+          </a:prstGeom>
+          <a:noFill/>
+        </p:spPr>
+        <p:txBody>
+          <a:bodyPr wrap="square">
+            <a:spAutoFit/>
+          </a:bodyPr>
+          <a:lstStyle/>
+          <a:p>
+            <a:pPr algn="ctr"/>
+            <a:r>
+              <a:rPr sz="2200" b="0" i="1">
+                <a:solidFill>
+                  <a:srgbClr val="AAAAAA"/>
                 </a:solidFill>
                 <a:latin typeface="Arial"/>
               </a:rPr>
@@ -4091,8 +3951,78 @@
         </p:nvSpPr>
         <p:spPr>
           <a:xfrm>
-            <a:off x="594360" y="2980944"/>
-            <a:ext cx="11002975" cy="347472"/>
+            <a:off x="640080" y="2985516"/>
+            <a:ext cx="10911535" cy="731520"/>
+          </a:xfrm>
+          <a:prstGeom prst="rect">
+            <a:avLst/>
+          </a:prstGeom>
+          <a:noFill/>
+        </p:spPr>
+        <p:txBody>
+          <a:bodyPr wrap="square">
+            <a:spAutoFit/>
+          </a:bodyPr>
+          <a:lstStyle/>
+          <a:p>
+            <a:pPr algn="ctr"/>
+            <a:r>
+              <a:rPr sz="4800" b="1" i="0">
+                <a:solidFill>
+                  <a:srgbClr val="FFFFFF"/>
+                </a:solidFill>
+                <a:latin typeface="Arial"/>
+              </a:rPr>
+              <a:t>愛  心にあふれ あなたを知る この愛こそあなた</a:t>
+            </a:r>
+          </a:p>
+        </p:txBody>
+      </p:sp>
+      <p:sp>
+        <p:nvSpPr>
+          <p:cNvPr id="5" name="TextBox 4"/>
+          <p:cNvSpPr txBox="1"/>
+          <p:nvPr/>
+        </p:nvSpPr>
+        <p:spPr>
+          <a:xfrm>
+            <a:off x="640080" y="3753612"/>
+            <a:ext cx="10911535" cy="365760"/>
+          </a:xfrm>
+          <a:prstGeom prst="rect">
+            <a:avLst/>
+          </a:prstGeom>
+          <a:noFill/>
+        </p:spPr>
+        <p:txBody>
+          <a:bodyPr wrap="square">
+            <a:spAutoFit/>
+          </a:bodyPr>
+          <a:lstStyle/>
+          <a:p>
+            <a:pPr algn="ctr"/>
+            <a:r>
+              <a:rPr sz="2400" b="0" i="1">
+                <a:solidFill>
+                  <a:srgbClr val="AAAAAA"/>
+                </a:solidFill>
+                <a:latin typeface="Arial"/>
+              </a:rPr>
+              <a:t>ai kokoro ni afure anata wo shiru kono ai koso anata</a:t>
+            </a:r>
+          </a:p>
+        </p:txBody>
+      </p:sp>
+      <p:sp>
+        <p:nvSpPr>
+          <p:cNvPr id="6" name="TextBox 5"/>
+          <p:cNvSpPr txBox="1"/>
+          <p:nvPr/>
+        </p:nvSpPr>
+        <p:spPr>
+          <a:xfrm>
+            <a:off x="640080" y="4530852"/>
+            <a:ext cx="10911535" cy="310896"/>
           </a:xfrm>
           <a:prstGeom prst="rect">
             <a:avLst/>
@@ -4109,81 +4039,11 @@
             <a:r>
               <a:rPr sz="2000" b="0" i="1">
                 <a:solidFill>
-                  <a:srgbClr val="8C8C8C"/>
-                </a:solidFill>
-                <a:latin typeface="Arial"/>
-              </a:rPr>
-              <a:t/>
-            </a:r>
-          </a:p>
-        </p:txBody>
-      </p:sp>
-      <p:sp>
-        <p:nvSpPr>
-          <p:cNvPr id="5" name="TextBox 4"/>
-          <p:cNvSpPr txBox="1"/>
-          <p:nvPr/>
-        </p:nvSpPr>
-        <p:spPr>
-          <a:xfrm>
-            <a:off x="594360" y="3529584"/>
-            <a:ext cx="11002975" cy="685800"/>
-          </a:xfrm>
-          <a:prstGeom prst="rect">
-            <a:avLst/>
-          </a:prstGeom>
-          <a:noFill/>
-        </p:spPr>
-        <p:txBody>
-          <a:bodyPr wrap="square">
-            <a:spAutoFit/>
-          </a:bodyPr>
-          <a:lstStyle/>
-          <a:p>
-            <a:pPr algn="ctr"/>
-            <a:r>
-              <a:rPr sz="4400" b="1" i="0">
-                <a:solidFill>
-                  <a:srgbClr val="FFFFFF"/>
-                </a:solidFill>
-                <a:latin typeface="Arial"/>
-              </a:rPr>
-              <a:t>愛  心にあふれ あなたを知る この愛こそあなた</a:t>
-            </a:r>
-          </a:p>
-        </p:txBody>
-      </p:sp>
-      <p:sp>
-        <p:nvSpPr>
-          <p:cNvPr id="6" name="TextBox 5"/>
-          <p:cNvSpPr txBox="1"/>
-          <p:nvPr/>
-        </p:nvSpPr>
-        <p:spPr>
-          <a:xfrm>
-            <a:off x="594360" y="4251960"/>
-            <a:ext cx="11002975" cy="384048"/>
-          </a:xfrm>
-          <a:prstGeom prst="rect">
-            <a:avLst/>
-          </a:prstGeom>
-          <a:noFill/>
-        </p:spPr>
-        <p:txBody>
-          <a:bodyPr wrap="square">
-            <a:spAutoFit/>
-          </a:bodyPr>
-          <a:lstStyle/>
-          <a:p>
-            <a:pPr algn="ctr"/>
-            <a:r>
-              <a:rPr sz="1938" b="0" i="1">
-                <a:solidFill>
-                  <a:srgbClr val="B4B4B4"/>
-                </a:solidFill>
-                <a:latin typeface="Arial"/>
-              </a:rPr>
-              <a:t>ai kokoro ni afure anata wo shiru kono ai koso anata</a:t>
+                  <a:srgbClr val="828282"/>
+                </a:solidFill>
+                <a:latin typeface="Arial"/>
+              </a:rPr>
+              <a:t>Santo, não há ninguém como Tu</a:t>
             </a:r>
           </a:p>
         </p:txBody>
@@ -4196,8 +4056,8 @@
         </p:nvSpPr>
         <p:spPr>
           <a:xfrm>
-            <a:off x="594360" y="4672584"/>
-            <a:ext cx="11002975" cy="347472"/>
+            <a:off x="640080" y="4896612"/>
+            <a:ext cx="10911535" cy="310896"/>
           </a:xfrm>
           <a:prstGeom prst="rect">
             <a:avLst/>
@@ -4214,11 +4074,11 @@
             <a:r>
               <a:rPr sz="2000" b="0" i="1">
                 <a:solidFill>
-                  <a:srgbClr val="8C8C8C"/>
-                </a:solidFill>
-                <a:latin typeface="Arial"/>
-              </a:rPr>
-              <a:t/>
+                  <a:srgbClr val="828282"/>
+                </a:solidFill>
+                <a:latin typeface="Arial"/>
+              </a:rPr>
+              <a:t>Não há outro além de Ti</a:t>
             </a:r>
           </a:p>
         </p:txBody>
@@ -4257,23 +4117,23 @@
         </p:nvSpPr>
         <p:spPr>
           <a:xfrm>
-            <a:off x="594360" y="2258568"/>
-            <a:ext cx="11002975" cy="685800"/>
-          </a:xfrm>
-          <a:prstGeom prst="rect">
-            <a:avLst/>
-          </a:prstGeom>
-          <a:noFill/>
-        </p:spPr>
-        <p:txBody>
-          <a:bodyPr wrap="square">
-            <a:spAutoFit/>
-          </a:bodyPr>
-          <a:lstStyle/>
-          <a:p>
-            <a:pPr algn="ctr"/>
-            <a:r>
-              <a:rPr sz="4400" b="1" i="0">
+            <a:off x="640080" y="2052828"/>
+            <a:ext cx="10911535" cy="731520"/>
+          </a:xfrm>
+          <a:prstGeom prst="rect">
+            <a:avLst/>
+          </a:prstGeom>
+          <a:noFill/>
+        </p:spPr>
+        <p:txBody>
+          <a:bodyPr wrap="square">
+            <a:spAutoFit/>
+          </a:bodyPr>
+          <a:lstStyle/>
+          <a:p>
+            <a:pPr algn="ctr"/>
+            <a:r>
+              <a:rPr sz="4800" b="1" i="0">
                 <a:solidFill>
                   <a:srgbClr val="FFFFFF"/>
                 </a:solidFill>
@@ -4292,25 +4152,60 @@
         </p:nvSpPr>
         <p:spPr>
           <a:xfrm>
-            <a:off x="594360" y="2980944"/>
-            <a:ext cx="11002975" cy="347472"/>
-          </a:xfrm>
-          <a:prstGeom prst="rect">
-            <a:avLst/>
-          </a:prstGeom>
-          <a:noFill/>
-        </p:spPr>
-        <p:txBody>
-          <a:bodyPr wrap="square">
-            <a:spAutoFit/>
-          </a:bodyPr>
-          <a:lstStyle/>
-          <a:p>
-            <a:pPr algn="ctr"/>
-            <a:r>
-              <a:rPr sz="2200" b="0" i="1">
-                <a:solidFill>
-                  <a:srgbClr val="8C8C8C"/>
+            <a:off x="640080" y="2985516"/>
+            <a:ext cx="10911535" cy="731520"/>
+          </a:xfrm>
+          <a:prstGeom prst="rect">
+            <a:avLst/>
+          </a:prstGeom>
+          <a:noFill/>
+        </p:spPr>
+        <p:txBody>
+          <a:bodyPr wrap="square">
+            <a:spAutoFit/>
+          </a:bodyPr>
+          <a:lstStyle/>
+          <a:p>
+            <a:pPr algn="ctr"/>
+            <a:r>
+              <a:rPr sz="4800" b="1" i="0">
+                <a:solidFill>
+                  <a:srgbClr val="FFFFFF"/>
+                </a:solidFill>
+                <a:latin typeface="Arial"/>
+              </a:rPr>
+              <a:t>Não há outro além de Ti</a:t>
+            </a:r>
+          </a:p>
+        </p:txBody>
+      </p:sp>
+      <p:sp>
+        <p:nvSpPr>
+          <p:cNvPr id="4" name="TextBox 3"/>
+          <p:cNvSpPr txBox="1"/>
+          <p:nvPr/>
+        </p:nvSpPr>
+        <p:spPr>
+          <a:xfrm>
+            <a:off x="640080" y="4128516"/>
+            <a:ext cx="10911535" cy="310896"/>
+          </a:xfrm>
+          <a:prstGeom prst="rect">
+            <a:avLst/>
+          </a:prstGeom>
+          <a:noFill/>
+        </p:spPr>
+        <p:txBody>
+          <a:bodyPr wrap="square">
+            <a:spAutoFit/>
+          </a:bodyPr>
+          <a:lstStyle/>
+          <a:p>
+            <a:pPr algn="ctr"/>
+            <a:r>
+              <a:rPr sz="2000" b="0" i="0">
+                <a:solidFill>
+                  <a:srgbClr val="828282"/>
                 </a:solidFill>
                 <a:latin typeface="Arial"/>
               </a:rPr>
@@ -4321,66 +4216,31 @@
       </p:sp>
       <p:sp>
         <p:nvSpPr>
-          <p:cNvPr id="4" name="TextBox 3"/>
-          <p:cNvSpPr txBox="1"/>
-          <p:nvPr/>
-        </p:nvSpPr>
-        <p:spPr>
-          <a:xfrm>
-            <a:off x="594360" y="3529584"/>
-            <a:ext cx="11002975" cy="685800"/>
-          </a:xfrm>
-          <a:prstGeom prst="rect">
-            <a:avLst/>
-          </a:prstGeom>
-          <a:noFill/>
-        </p:spPr>
-        <p:txBody>
-          <a:bodyPr wrap="square">
-            <a:spAutoFit/>
-          </a:bodyPr>
-          <a:lstStyle/>
-          <a:p>
-            <a:pPr algn="ctr"/>
-            <a:r>
-              <a:rPr sz="4400" b="1" i="0">
-                <a:solidFill>
-                  <a:srgbClr val="FFFFFF"/>
-                </a:solidFill>
-                <a:latin typeface="Arial"/>
-              </a:rPr>
-              <a:t>Não há outro além de Ti</a:t>
-            </a:r>
-          </a:p>
-        </p:txBody>
-      </p:sp>
-      <p:sp>
-        <p:nvSpPr>
           <p:cNvPr id="5" name="TextBox 4"/>
           <p:cNvSpPr txBox="1"/>
           <p:nvPr/>
         </p:nvSpPr>
         <p:spPr>
           <a:xfrm>
-            <a:off x="594360" y="4251960"/>
-            <a:ext cx="11002975" cy="347472"/>
-          </a:xfrm>
-          <a:prstGeom prst="rect">
-            <a:avLst/>
-          </a:prstGeom>
-          <a:noFill/>
-        </p:spPr>
-        <p:txBody>
-          <a:bodyPr wrap="square">
-            <a:spAutoFit/>
-          </a:bodyPr>
-          <a:lstStyle/>
-          <a:p>
-            <a:pPr algn="ctr"/>
-            <a:r>
-              <a:rPr sz="2200" b="0" i="1">
-                <a:solidFill>
-                  <a:srgbClr val="8C8C8C"/>
+            <a:off x="640080" y="4494276"/>
+            <a:ext cx="10911535" cy="310896"/>
+          </a:xfrm>
+          <a:prstGeom prst="rect">
+            <a:avLst/>
+          </a:prstGeom>
+          <a:noFill/>
+        </p:spPr>
+        <p:txBody>
+          <a:bodyPr wrap="square">
+            <a:spAutoFit/>
+          </a:bodyPr>
+          <a:lstStyle/>
+          <a:p>
+            <a:pPr algn="ctr"/>
+            <a:r>
+              <a:rPr sz="2000" b="0" i="0">
+                <a:solidFill>
+                  <a:srgbClr val="828282"/>
                 </a:solidFill>
                 <a:latin typeface="Arial"/>
               </a:rPr>
@@ -4423,23 +4283,23 @@
         </p:nvSpPr>
         <p:spPr>
           <a:xfrm>
-            <a:off x="594360" y="2258568"/>
-            <a:ext cx="11002975" cy="685800"/>
-          </a:xfrm>
-          <a:prstGeom prst="rect">
-            <a:avLst/>
-          </a:prstGeom>
-          <a:noFill/>
-        </p:spPr>
-        <p:txBody>
-          <a:bodyPr wrap="square">
-            <a:spAutoFit/>
-          </a:bodyPr>
-          <a:lstStyle/>
-          <a:p>
-            <a:pPr algn="ctr"/>
-            <a:r>
-              <a:rPr sz="4400" b="1" i="0">
+            <a:off x="640080" y="2052828"/>
+            <a:ext cx="10911535" cy="731520"/>
+          </a:xfrm>
+          <a:prstGeom prst="rect">
+            <a:avLst/>
+          </a:prstGeom>
+          <a:noFill/>
+        </p:spPr>
+        <p:txBody>
+          <a:bodyPr wrap="square">
+            <a:spAutoFit/>
+          </a:bodyPr>
+          <a:lstStyle/>
+          <a:p>
+            <a:pPr algn="ctr"/>
+            <a:r>
+              <a:rPr sz="4800" b="1" i="0">
                 <a:solidFill>
                   <a:srgbClr val="FFFFFF"/>
                 </a:solidFill>
@@ -4458,29 +4318,29 @@
         </p:nvSpPr>
         <p:spPr>
           <a:xfrm>
-            <a:off x="594360" y="2980944"/>
-            <a:ext cx="11002975" cy="347472"/>
-          </a:xfrm>
-          <a:prstGeom prst="rect">
-            <a:avLst/>
-          </a:prstGeom>
-          <a:noFill/>
-        </p:spPr>
-        <p:txBody>
-          <a:bodyPr wrap="square">
-            <a:spAutoFit/>
-          </a:bodyPr>
-          <a:lstStyle/>
-          <a:p>
-            <a:pPr algn="ctr"/>
-            <a:r>
-              <a:rPr sz="2200" b="0" i="1">
-                <a:solidFill>
-                  <a:srgbClr val="8C8C8C"/>
-                </a:solidFill>
-                <a:latin typeface="Arial"/>
-              </a:rPr>
-              <a:t/>
+            <a:off x="640080" y="2985516"/>
+            <a:ext cx="10911535" cy="731520"/>
+          </a:xfrm>
+          <a:prstGeom prst="rect">
+            <a:avLst/>
+          </a:prstGeom>
+          <a:noFill/>
+        </p:spPr>
+        <p:txBody>
+          <a:bodyPr wrap="square">
+            <a:spAutoFit/>
+          </a:bodyPr>
+          <a:lstStyle/>
+          <a:p>
+            <a:pPr algn="ctr"/>
+            <a:r>
+              <a:rPr sz="4800" b="1" i="0">
+                <a:solidFill>
+                  <a:srgbClr val="FFFFFF"/>
+                </a:solidFill>
+                <a:latin typeface="Arial"/>
+              </a:rPr>
+              <a:t>Mostra-me quem Tu és</a:t>
             </a:r>
           </a:p>
         </p:txBody>
@@ -4493,29 +4353,29 @@
         </p:nvSpPr>
         <p:spPr>
           <a:xfrm>
-            <a:off x="594360" y="3529584"/>
-            <a:ext cx="11002975" cy="685800"/>
-          </a:xfrm>
-          <a:prstGeom prst="rect">
-            <a:avLst/>
-          </a:prstGeom>
-          <a:noFill/>
-        </p:spPr>
-        <p:txBody>
-          <a:bodyPr wrap="square">
-            <a:spAutoFit/>
-          </a:bodyPr>
-          <a:lstStyle/>
-          <a:p>
-            <a:pPr algn="ctr"/>
-            <a:r>
-              <a:rPr sz="4400" b="1" i="0">
-                <a:solidFill>
-                  <a:srgbClr val="FFFFFF"/>
-                </a:solidFill>
-                <a:latin typeface="Arial"/>
-              </a:rPr>
-              <a:t>Mostra-me quem Tu és</a:t>
+            <a:off x="640080" y="4128516"/>
+            <a:ext cx="10911535" cy="310896"/>
+          </a:xfrm>
+          <a:prstGeom prst="rect">
+            <a:avLst/>
+          </a:prstGeom>
+          <a:noFill/>
+        </p:spPr>
+        <p:txBody>
+          <a:bodyPr wrap="square">
+            <a:spAutoFit/>
+          </a:bodyPr>
+          <a:lstStyle/>
+          <a:p>
+            <a:pPr algn="ctr"/>
+            <a:r>
+              <a:rPr sz="2000" b="0" i="0">
+                <a:solidFill>
+                  <a:srgbClr val="828282"/>
+                </a:solidFill>
+                <a:latin typeface="Arial"/>
+              </a:rPr>
+              <a:t>Holy あなただけが唯一の神　私の目 ひらいて</a:t>
             </a:r>
           </a:p>
         </p:txBody>
@@ -4528,29 +4388,29 @@
         </p:nvSpPr>
         <p:spPr>
           <a:xfrm>
-            <a:off x="594360" y="4251960"/>
-            <a:ext cx="11002975" cy="347472"/>
-          </a:xfrm>
-          <a:prstGeom prst="rect">
-            <a:avLst/>
-          </a:prstGeom>
-          <a:noFill/>
-        </p:spPr>
-        <p:txBody>
-          <a:bodyPr wrap="square">
-            <a:spAutoFit/>
-          </a:bodyPr>
-          <a:lstStyle/>
-          <a:p>
-            <a:pPr algn="ctr"/>
-            <a:r>
-              <a:rPr sz="2200" b="0" i="1">
-                <a:solidFill>
-                  <a:srgbClr val="8C8C8C"/>
-                </a:solidFill>
-                <a:latin typeface="Arial"/>
-              </a:rPr>
-              <a:t/>
+            <a:off x="640080" y="4494276"/>
+            <a:ext cx="10911535" cy="310896"/>
+          </a:xfrm>
+          <a:prstGeom prst="rect">
+            <a:avLst/>
+          </a:prstGeom>
+          <a:noFill/>
+        </p:spPr>
+        <p:txBody>
+          <a:bodyPr wrap="square">
+            <a:spAutoFit/>
+          </a:bodyPr>
+          <a:lstStyle/>
+          <a:p>
+            <a:pPr algn="ctr"/>
+            <a:r>
+              <a:rPr sz="2000" b="0" i="0">
+                <a:solidFill>
+                  <a:srgbClr val="828282"/>
+                </a:solidFill>
+                <a:latin typeface="Arial"/>
+              </a:rPr>
+              <a:t>愛  心にあふれ あなたを知る この愛こそあなた</a:t>
             </a:r>
           </a:p>
         </p:txBody>
@@ -4589,23 +4449,23 @@
         </p:nvSpPr>
         <p:spPr>
           <a:xfrm>
-            <a:off x="594360" y="2258568"/>
-            <a:ext cx="11002975" cy="685800"/>
-          </a:xfrm>
-          <a:prstGeom prst="rect">
-            <a:avLst/>
-          </a:prstGeom>
-          <a:noFill/>
-        </p:spPr>
-        <p:txBody>
-          <a:bodyPr wrap="square">
-            <a:spAutoFit/>
-          </a:bodyPr>
-          <a:lstStyle/>
-          <a:p>
-            <a:pPr algn="ctr"/>
-            <a:r>
-              <a:rPr sz="4400" b="1" i="0">
+            <a:off x="640080" y="2052828"/>
+            <a:ext cx="10911535" cy="731520"/>
+          </a:xfrm>
+          <a:prstGeom prst="rect">
+            <a:avLst/>
+          </a:prstGeom>
+          <a:noFill/>
+        </p:spPr>
+        <p:txBody>
+          <a:bodyPr wrap="square">
+            <a:spAutoFit/>
+          </a:bodyPr>
+          <a:lstStyle/>
+          <a:p>
+            <a:pPr algn="ctr"/>
+            <a:r>
+              <a:rPr sz="4800" b="1" i="0">
                 <a:solidFill>
                   <a:srgbClr val="FFFFFF"/>
                 </a:solidFill>
@@ -4624,99 +4484,29 @@
         </p:nvSpPr>
         <p:spPr>
           <a:xfrm>
-            <a:off x="594360" y="2980944"/>
-            <a:ext cx="11002975" cy="347472"/>
-          </a:xfrm>
-          <a:prstGeom prst="rect">
-            <a:avLst/>
-          </a:prstGeom>
-          <a:noFill/>
-        </p:spPr>
-        <p:txBody>
-          <a:bodyPr wrap="square">
-            <a:spAutoFit/>
-          </a:bodyPr>
-          <a:lstStyle/>
-          <a:p>
-            <a:pPr algn="ctr"/>
-            <a:r>
-              <a:rPr sz="2200" b="0" i="1">
-                <a:solidFill>
-                  <a:srgbClr val="8C8C8C"/>
-                </a:solidFill>
-                <a:latin typeface="Arial"/>
-              </a:rPr>
-              <a:t/>
-            </a:r>
-          </a:p>
-        </p:txBody>
-      </p:sp>
-      <p:sp>
-        <p:nvSpPr>
-          <p:cNvPr id="4" name="TextBox 3"/>
-          <p:cNvSpPr txBox="1"/>
-          <p:nvPr/>
-        </p:nvSpPr>
-        <p:spPr>
-          <a:xfrm>
-            <a:off x="594360" y="3529584"/>
-            <a:ext cx="11002975" cy="685800"/>
-          </a:xfrm>
-          <a:prstGeom prst="rect">
-            <a:avLst/>
-          </a:prstGeom>
-          <a:noFill/>
-        </p:spPr>
-        <p:txBody>
-          <a:bodyPr wrap="square">
-            <a:spAutoFit/>
-          </a:bodyPr>
-          <a:lstStyle/>
-          <a:p>
-            <a:pPr algn="ctr"/>
-            <a:r>
-              <a:rPr sz="4400" b="1" i="0">
+            <a:off x="640080" y="2985516"/>
+            <a:ext cx="10911535" cy="731520"/>
+          </a:xfrm>
+          <a:prstGeom prst="rect">
+            <a:avLst/>
+          </a:prstGeom>
+          <a:noFill/>
+        </p:spPr>
+        <p:txBody>
+          <a:bodyPr wrap="square">
+            <a:spAutoFit/>
+          </a:bodyPr>
+          <a:lstStyle/>
+          <a:p>
+            <a:pPr algn="ctr"/>
+            <a:r>
+              <a:rPr sz="4800" b="1" i="0">
                 <a:solidFill>
                   <a:srgbClr val="FFFFFF"/>
                 </a:solidFill>
                 <a:latin typeface="Arial"/>
               </a:rPr>
               <a:t>E guia-me em Teu amor</a:t>
-            </a:r>
-          </a:p>
-        </p:txBody>
-      </p:sp>
-      <p:sp>
-        <p:nvSpPr>
-          <p:cNvPr id="5" name="TextBox 4"/>
-          <p:cNvSpPr txBox="1"/>
-          <p:nvPr/>
-        </p:nvSpPr>
-        <p:spPr>
-          <a:xfrm>
-            <a:off x="594360" y="4251960"/>
-            <a:ext cx="11002975" cy="347472"/>
-          </a:xfrm>
-          <a:prstGeom prst="rect">
-            <a:avLst/>
-          </a:prstGeom>
-          <a:noFill/>
-        </p:spPr>
-        <p:txBody>
-          <a:bodyPr wrap="square">
-            <a:spAutoFit/>
-          </a:bodyPr>
-          <a:lstStyle/>
-          <a:p>
-            <a:pPr algn="ctr"/>
-            <a:r>
-              <a:rPr sz="2200" b="0" i="1">
-                <a:solidFill>
-                  <a:srgbClr val="8C8C8C"/>
-                </a:solidFill>
-                <a:latin typeface="Arial"/>
-              </a:rPr>
-              <a:t/>
             </a:r>
           </a:p>
         </p:txBody>
@@ -4755,23 +4545,23 @@
         </p:nvSpPr>
         <p:spPr>
           <a:xfrm>
-            <a:off x="594360" y="1837944"/>
-            <a:ext cx="11002975" cy="685800"/>
-          </a:xfrm>
-          <a:prstGeom prst="rect">
-            <a:avLst/>
-          </a:prstGeom>
-          <a:noFill/>
-        </p:spPr>
-        <p:txBody>
-          <a:bodyPr wrap="square">
-            <a:spAutoFit/>
-          </a:bodyPr>
-          <a:lstStyle/>
-          <a:p>
-            <a:pPr algn="ctr"/>
-            <a:r>
-              <a:rPr sz="4400" b="1" i="0">
+            <a:off x="640080" y="1650492"/>
+            <a:ext cx="10911535" cy="731520"/>
+          </a:xfrm>
+          <a:prstGeom prst="rect">
+            <a:avLst/>
+          </a:prstGeom>
+          <a:noFill/>
+        </p:spPr>
+        <p:txBody>
+          <a:bodyPr wrap="square">
+            <a:spAutoFit/>
+          </a:bodyPr>
+          <a:lstStyle/>
+          <a:p>
+            <a:pPr algn="ctr"/>
+            <a:r>
+              <a:rPr sz="4800" b="1" i="0">
                 <a:solidFill>
                   <a:srgbClr val="FFFFFF"/>
                 </a:solidFill>
@@ -4790,8 +4580,8 @@
         </p:nvSpPr>
         <p:spPr>
           <a:xfrm>
-            <a:off x="594360" y="2560320"/>
-            <a:ext cx="11002975" cy="384048"/>
+            <a:off x="640080" y="2418588"/>
+            <a:ext cx="10911535" cy="365760"/>
           </a:xfrm>
           <a:prstGeom prst="rect">
             <a:avLst/>
@@ -4808,7 +4598,7 @@
             <a:r>
               <a:rPr sz="2400" b="0" i="1">
                 <a:solidFill>
-                  <a:srgbClr val="B4B4B4"/>
+                  <a:srgbClr val="AAAAAA"/>
                 </a:solidFill>
                 <a:latin typeface="Arial"/>
               </a:rPr>
@@ -4825,8 +4615,78 @@
         </p:nvSpPr>
         <p:spPr>
           <a:xfrm>
-            <a:off x="594360" y="2980944"/>
-            <a:ext cx="11002975" cy="347472"/>
+            <a:off x="640080" y="2985516"/>
+            <a:ext cx="10911535" cy="731520"/>
+          </a:xfrm>
+          <a:prstGeom prst="rect">
+            <a:avLst/>
+          </a:prstGeom>
+          <a:noFill/>
+        </p:spPr>
+        <p:txBody>
+          <a:bodyPr wrap="square">
+            <a:spAutoFit/>
+          </a:bodyPr>
+          <a:lstStyle/>
+          <a:p>
+            <a:pPr algn="ctr"/>
+            <a:r>
+              <a:rPr sz="4800" b="1" i="0">
+                <a:solidFill>
+                  <a:srgbClr val="FFFFFF"/>
+                </a:solidFill>
+                <a:latin typeface="Arial"/>
+              </a:rPr>
+              <a:t>この人生　信仰　私は倒れない (x2)</a:t>
+            </a:r>
+          </a:p>
+        </p:txBody>
+      </p:sp>
+      <p:sp>
+        <p:nvSpPr>
+          <p:cNvPr id="5" name="TextBox 4"/>
+          <p:cNvSpPr txBox="1"/>
+          <p:nvPr/>
+        </p:nvSpPr>
+        <p:spPr>
+          <a:xfrm>
+            <a:off x="640080" y="3753612"/>
+            <a:ext cx="10911535" cy="365760"/>
+          </a:xfrm>
+          <a:prstGeom prst="rect">
+            <a:avLst/>
+          </a:prstGeom>
+          <a:noFill/>
+        </p:spPr>
+        <p:txBody>
+          <a:bodyPr wrap="square">
+            <a:spAutoFit/>
+          </a:bodyPr>
+          <a:lstStyle/>
+          <a:p>
+            <a:pPr algn="ctr"/>
+            <a:r>
+              <a:rPr sz="2400" b="0" i="1">
+                <a:solidFill>
+                  <a:srgbClr val="AAAAAA"/>
+                </a:solidFill>
+                <a:latin typeface="Arial"/>
+              </a:rPr>
+              <a:t>kono inochi     shinkou watashi wa taorenai</a:t>
+            </a:r>
+          </a:p>
+        </p:txBody>
+      </p:sp>
+      <p:sp>
+        <p:nvSpPr>
+          <p:cNvPr id="6" name="TextBox 5"/>
+          <p:cNvSpPr txBox="1"/>
+          <p:nvPr/>
+        </p:nvSpPr>
+        <p:spPr>
+          <a:xfrm>
+            <a:off x="640080" y="4530852"/>
+            <a:ext cx="10911535" cy="310896"/>
           </a:xfrm>
           <a:prstGeom prst="rect">
             <a:avLst/>
@@ -4843,81 +4703,11 @@
             <a:r>
               <a:rPr sz="2000" b="0" i="1">
                 <a:solidFill>
-                  <a:srgbClr val="8C8C8C"/>
-                </a:solidFill>
-                <a:latin typeface="Arial"/>
-              </a:rPr>
-              <a:t/>
-            </a:r>
-          </a:p>
-        </p:txBody>
-      </p:sp>
-      <p:sp>
-        <p:nvSpPr>
-          <p:cNvPr id="5" name="TextBox 4"/>
-          <p:cNvSpPr txBox="1"/>
-          <p:nvPr/>
-        </p:nvSpPr>
-        <p:spPr>
-          <a:xfrm>
-            <a:off x="594360" y="3529584"/>
-            <a:ext cx="11002975" cy="685800"/>
-          </a:xfrm>
-          <a:prstGeom prst="rect">
-            <a:avLst/>
-          </a:prstGeom>
-          <a:noFill/>
-        </p:spPr>
-        <p:txBody>
-          <a:bodyPr wrap="square">
-            <a:spAutoFit/>
-          </a:bodyPr>
-          <a:lstStyle/>
-          <a:p>
-            <a:pPr algn="ctr"/>
-            <a:r>
-              <a:rPr sz="4400" b="1" i="0">
-                <a:solidFill>
-                  <a:srgbClr val="FFFFFF"/>
-                </a:solidFill>
-                <a:latin typeface="Arial"/>
-              </a:rPr>
-              <a:t>この人生　信仰　私は倒れない (x2)</a:t>
-            </a:r>
-          </a:p>
-        </p:txBody>
-      </p:sp>
-      <p:sp>
-        <p:nvSpPr>
-          <p:cNvPr id="6" name="TextBox 5"/>
-          <p:cNvSpPr txBox="1"/>
-          <p:nvPr/>
-        </p:nvSpPr>
-        <p:spPr>
-          <a:xfrm>
-            <a:off x="594360" y="4251960"/>
-            <a:ext cx="11002975" cy="384048"/>
-          </a:xfrm>
-          <a:prstGeom prst="rect">
-            <a:avLst/>
-          </a:prstGeom>
-          <a:noFill/>
-        </p:spPr>
-        <p:txBody>
-          <a:bodyPr wrap="square">
-            <a:spAutoFit/>
-          </a:bodyPr>
-          <a:lstStyle/>
-          <a:p>
-            <a:pPr algn="ctr"/>
-            <a:r>
-              <a:rPr sz="2344" b="0" i="1">
-                <a:solidFill>
-                  <a:srgbClr val="B4B4B4"/>
-                </a:solidFill>
-                <a:latin typeface="Arial"/>
-              </a:rPr>
-              <a:t>kono inochi     shinkou watashi wa taorenai</a:t>
+                  <a:srgbClr val="828282"/>
+                </a:solidFill>
+                <a:latin typeface="Arial"/>
+              </a:rPr>
+              <a:t>Edifico minha vida em Ti, Senhor</a:t>
             </a:r>
           </a:p>
         </p:txBody>
@@ -4930,8 +4720,8 @@
         </p:nvSpPr>
         <p:spPr>
           <a:xfrm>
-            <a:off x="594360" y="4672584"/>
-            <a:ext cx="11002975" cy="347472"/>
+            <a:off x="640080" y="4896612"/>
+            <a:ext cx="10911535" cy="310896"/>
           </a:xfrm>
           <a:prstGeom prst="rect">
             <a:avLst/>
@@ -4948,11 +4738,11 @@
             <a:r>
               <a:rPr sz="2000" b="0" i="1">
                 <a:solidFill>
-                  <a:srgbClr val="8C8C8C"/>
-                </a:solidFill>
-                <a:latin typeface="Arial"/>
-              </a:rPr>
-              <a:t/>
+                  <a:srgbClr val="828282"/>
+                </a:solidFill>
+                <a:latin typeface="Arial"/>
+              </a:rPr>
+              <a:t>Em Ti somente</a:t>
             </a:r>
           </a:p>
         </p:txBody>
@@ -4991,23 +4781,23 @@
         </p:nvSpPr>
         <p:spPr>
           <a:xfrm>
-            <a:off x="594360" y="1837944"/>
-            <a:ext cx="11002975" cy="685800"/>
-          </a:xfrm>
-          <a:prstGeom prst="rect">
-            <a:avLst/>
-          </a:prstGeom>
-          <a:noFill/>
-        </p:spPr>
-        <p:txBody>
-          <a:bodyPr wrap="square">
-            <a:spAutoFit/>
-          </a:bodyPr>
-          <a:lstStyle/>
-          <a:p>
-            <a:pPr algn="ctr"/>
-            <a:r>
-              <a:rPr sz="4400" b="1" i="0">
+            <a:off x="640080" y="1650492"/>
+            <a:ext cx="10911535" cy="731520"/>
+          </a:xfrm>
+          <a:prstGeom prst="rect">
+            <a:avLst/>
+          </a:prstGeom>
+          <a:noFill/>
+        </p:spPr>
+        <p:txBody>
+          <a:bodyPr wrap="square">
+            <a:spAutoFit/>
+          </a:bodyPr>
+          <a:lstStyle/>
+          <a:p>
+            <a:pPr algn="ctr"/>
+            <a:r>
+              <a:rPr sz="4800" b="1" i="0">
                 <a:solidFill>
                   <a:srgbClr val="FFFFFF"/>
                 </a:solidFill>
@@ -5026,8 +4816,8 @@
         </p:nvSpPr>
         <p:spPr>
           <a:xfrm>
-            <a:off x="594360" y="2560320"/>
-            <a:ext cx="11002975" cy="384048"/>
+            <a:off x="640080" y="2418588"/>
+            <a:ext cx="10911535" cy="365760"/>
           </a:xfrm>
           <a:prstGeom prst="rect">
             <a:avLst/>
@@ -5044,7 +4834,7 @@
             <a:r>
               <a:rPr sz="2400" b="0" i="1">
                 <a:solidFill>
-                  <a:srgbClr val="B4B4B4"/>
+                  <a:srgbClr val="AAAAAA"/>
                 </a:solidFill>
                 <a:latin typeface="Arial"/>
               </a:rPr>
@@ -5061,8 +4851,78 @@
         </p:nvSpPr>
         <p:spPr>
           <a:xfrm>
-            <a:off x="594360" y="2980944"/>
-            <a:ext cx="11002975" cy="347472"/>
+            <a:off x="640080" y="2985516"/>
+            <a:ext cx="10911535" cy="731520"/>
+          </a:xfrm>
+          <a:prstGeom prst="rect">
+            <a:avLst/>
+          </a:prstGeom>
+          <a:noFill/>
+        </p:spPr>
+        <p:txBody>
+          <a:bodyPr wrap="square">
+            <a:spAutoFit/>
+          </a:bodyPr>
+          <a:lstStyle/>
+          <a:p>
+            <a:pPr algn="ctr"/>
+            <a:r>
+              <a:rPr sz="4800" b="1" i="0">
+                <a:solidFill>
+                  <a:srgbClr val="FFFFFF"/>
+                </a:solidFill>
+                <a:latin typeface="Arial"/>
+              </a:rPr>
+              <a:t>すべての名に勝る御名を</a:t>
+            </a:r>
+          </a:p>
+        </p:txBody>
+      </p:sp>
+      <p:sp>
+        <p:nvSpPr>
+          <p:cNvPr id="5" name="TextBox 4"/>
+          <p:cNvSpPr txBox="1"/>
+          <p:nvPr/>
+        </p:nvSpPr>
+        <p:spPr>
+          <a:xfrm>
+            <a:off x="640080" y="3753612"/>
+            <a:ext cx="10911535" cy="365760"/>
+          </a:xfrm>
+          <a:prstGeom prst="rect">
+            <a:avLst/>
+          </a:prstGeom>
+          <a:noFill/>
+        </p:spPr>
+        <p:txBody>
+          <a:bodyPr wrap="square">
+            <a:spAutoFit/>
+          </a:bodyPr>
+          <a:lstStyle/>
+          <a:p>
+            <a:pPr algn="ctr"/>
+            <a:r>
+              <a:rPr sz="2400" b="0" i="1">
+                <a:solidFill>
+                  <a:srgbClr val="AAAAAA"/>
+                </a:solidFill>
+                <a:latin typeface="Arial"/>
+              </a:rPr>
+              <a:t>subete no nani masaru mina wo</a:t>
+            </a:r>
+          </a:p>
+        </p:txBody>
+      </p:sp>
+      <p:sp>
+        <p:nvSpPr>
+          <p:cNvPr id="6" name="TextBox 5"/>
+          <p:cNvSpPr txBox="1"/>
+          <p:nvPr/>
+        </p:nvSpPr>
+        <p:spPr>
+          <a:xfrm>
+            <a:off x="640080" y="4530852"/>
+            <a:ext cx="10911535" cy="310896"/>
           </a:xfrm>
           <a:prstGeom prst="rect">
             <a:avLst/>
@@ -5079,81 +4939,11 @@
             <a:r>
               <a:rPr sz="2000" b="0" i="1">
                 <a:solidFill>
-                  <a:srgbClr val="8C8C8C"/>
-                </a:solidFill>
-                <a:latin typeface="Arial"/>
-              </a:rPr>
-              <a:t/>
-            </a:r>
-          </a:p>
-        </p:txBody>
-      </p:sp>
-      <p:sp>
-        <p:nvSpPr>
-          <p:cNvPr id="5" name="TextBox 4"/>
-          <p:cNvSpPr txBox="1"/>
-          <p:nvPr/>
-        </p:nvSpPr>
-        <p:spPr>
-          <a:xfrm>
-            <a:off x="594360" y="3529584"/>
-            <a:ext cx="11002975" cy="685800"/>
-          </a:xfrm>
-          <a:prstGeom prst="rect">
-            <a:avLst/>
-          </a:prstGeom>
-          <a:noFill/>
-        </p:spPr>
-        <p:txBody>
-          <a:bodyPr wrap="square">
-            <a:spAutoFit/>
-          </a:bodyPr>
-          <a:lstStyle/>
-          <a:p>
-            <a:pPr algn="ctr"/>
-            <a:r>
-              <a:rPr sz="4400" b="1" i="0">
-                <a:solidFill>
-                  <a:srgbClr val="FFFFFF"/>
-                </a:solidFill>
-                <a:latin typeface="Arial"/>
-              </a:rPr>
-              <a:t>すべての名に勝る御名を</a:t>
-            </a:r>
-          </a:p>
-        </p:txBody>
-      </p:sp>
-      <p:sp>
-        <p:nvSpPr>
-          <p:cNvPr id="6" name="TextBox 5"/>
-          <p:cNvSpPr txBox="1"/>
-          <p:nvPr/>
-        </p:nvSpPr>
-        <p:spPr>
-          <a:xfrm>
-            <a:off x="594360" y="4251960"/>
-            <a:ext cx="11002975" cy="384048"/>
-          </a:xfrm>
-          <a:prstGeom prst="rect">
-            <a:avLst/>
-          </a:prstGeom>
-          <a:noFill/>
-        </p:spPr>
-        <p:txBody>
-          <a:bodyPr wrap="square">
-            <a:spAutoFit/>
-          </a:bodyPr>
-          <a:lstStyle/>
-          <a:p>
-            <a:pPr algn="ctr"/>
-            <a:r>
-              <a:rPr sz="2400" b="0" i="1">
-                <a:solidFill>
-                  <a:srgbClr val="B4B4B4"/>
-                </a:solidFill>
-                <a:latin typeface="Arial"/>
-              </a:rPr>
-              <a:t>subete no nani masaru mina wo</a:t>
+                  <a:srgbClr val="828282"/>
+                </a:solidFill>
+                <a:latin typeface="Arial"/>
+              </a:rPr>
+              <a:t>Digno de cada fôlego que possamos dar</a:t>
             </a:r>
           </a:p>
         </p:txBody>
@@ -5166,8 +4956,8 @@
         </p:nvSpPr>
         <p:spPr>
           <a:xfrm>
-            <a:off x="594360" y="4672584"/>
-            <a:ext cx="11002975" cy="347472"/>
+            <a:off x="640080" y="4896612"/>
+            <a:ext cx="10911535" cy="310896"/>
           </a:xfrm>
           <a:prstGeom prst="rect">
             <a:avLst/>
@@ -5184,11 +4974,11 @@
             <a:r>
               <a:rPr sz="2000" b="0" i="1">
                 <a:solidFill>
-                  <a:srgbClr val="8C8C8C"/>
-                </a:solidFill>
-                <a:latin typeface="Arial"/>
-              </a:rPr>
-              <a:t/>
+                  <a:srgbClr val="828282"/>
+                </a:solidFill>
+                <a:latin typeface="Arial"/>
+              </a:rPr>
+              <a:t>Vivemos para Ti</a:t>
             </a:r>
           </a:p>
         </p:txBody>
@@ -5227,23 +5017,23 @@
         </p:nvSpPr>
         <p:spPr>
           <a:xfrm>
-            <a:off x="594360" y="1837944"/>
-            <a:ext cx="11002975" cy="685800"/>
-          </a:xfrm>
-          <a:prstGeom prst="rect">
-            <a:avLst/>
-          </a:prstGeom>
-          <a:noFill/>
-        </p:spPr>
-        <p:txBody>
-          <a:bodyPr wrap="square">
-            <a:spAutoFit/>
-          </a:bodyPr>
-          <a:lstStyle/>
-          <a:p>
-            <a:pPr algn="ctr"/>
-            <a:r>
-              <a:rPr sz="4400" b="1" i="0">
+            <a:off x="640080" y="1650492"/>
+            <a:ext cx="10911535" cy="731520"/>
+          </a:xfrm>
+          <a:prstGeom prst="rect">
+            <a:avLst/>
+          </a:prstGeom>
+          <a:noFill/>
+        </p:spPr>
+        <p:txBody>
+          <a:bodyPr wrap="square">
+            <a:spAutoFit/>
+          </a:bodyPr>
+          <a:lstStyle/>
+          <a:p>
+            <a:pPr algn="ctr"/>
+            <a:r>
+              <a:rPr sz="4800" b="1" i="0">
                 <a:solidFill>
                   <a:srgbClr val="FFFFFF"/>
                 </a:solidFill>
@@ -5262,8 +5052,8 @@
         </p:nvSpPr>
         <p:spPr>
           <a:xfrm>
-            <a:off x="594360" y="2560320"/>
-            <a:ext cx="11002975" cy="384048"/>
+            <a:off x="640080" y="2418588"/>
+            <a:ext cx="10911535" cy="365760"/>
           </a:xfrm>
           <a:prstGeom prst="rect">
             <a:avLst/>
@@ -5280,7 +5070,7 @@
             <a:r>
               <a:rPr sz="2400" b="0" i="1">
                 <a:solidFill>
-                  <a:srgbClr val="B4B4B4"/>
+                  <a:srgbClr val="AAAAAA"/>
                 </a:solidFill>
                 <a:latin typeface="Arial"/>
               </a:rPr>
@@ -5297,8 +5087,78 @@
         </p:nvSpPr>
         <p:spPr>
           <a:xfrm>
-            <a:off x="594360" y="2980944"/>
-            <a:ext cx="11002975" cy="347472"/>
+            <a:off x="640080" y="2985516"/>
+            <a:ext cx="10911535" cy="731520"/>
+          </a:xfrm>
+          <a:prstGeom prst="rect">
+            <a:avLst/>
+          </a:prstGeom>
+          <a:noFill/>
+        </p:spPr>
+        <p:txBody>
+          <a:bodyPr wrap="square">
+            <a:spAutoFit/>
+          </a:bodyPr>
+          <a:lstStyle/>
+          <a:p>
+            <a:pPr algn="ctr"/>
+            <a:r>
+              <a:rPr sz="4800" b="1" i="0">
+                <a:solidFill>
+                  <a:srgbClr val="FFFFFF"/>
+                </a:solidFill>
+                <a:latin typeface="Arial"/>
+              </a:rPr>
+              <a:t>唇にのせていま歌おう　主イエスよ</a:t>
+            </a:r>
+          </a:p>
+        </p:txBody>
+      </p:sp>
+      <p:sp>
+        <p:nvSpPr>
+          <p:cNvPr id="5" name="TextBox 4"/>
+          <p:cNvSpPr txBox="1"/>
+          <p:nvPr/>
+        </p:nvSpPr>
+        <p:spPr>
+          <a:xfrm>
+            <a:off x="640080" y="3753612"/>
+            <a:ext cx="10911535" cy="365760"/>
+          </a:xfrm>
+          <a:prstGeom prst="rect">
+            <a:avLst/>
+          </a:prstGeom>
+          <a:noFill/>
+        </p:spPr>
+        <p:txBody>
+          <a:bodyPr wrap="square">
+            <a:spAutoFit/>
+          </a:bodyPr>
+          <a:lstStyle/>
+          <a:p>
+            <a:pPr algn="ctr"/>
+            <a:r>
+              <a:rPr sz="2400" b="0" i="1">
+                <a:solidFill>
+                  <a:srgbClr val="AAAAAA"/>
+                </a:solidFill>
+                <a:latin typeface="Arial"/>
+              </a:rPr>
+              <a:t>kuchibiru ni nosete  ima utaou shu iesu yo</a:t>
+            </a:r>
+          </a:p>
+        </p:txBody>
+      </p:sp>
+      <p:sp>
+        <p:nvSpPr>
+          <p:cNvPr id="6" name="TextBox 5"/>
+          <p:cNvSpPr txBox="1"/>
+          <p:nvPr/>
+        </p:nvSpPr>
+        <p:spPr>
+          <a:xfrm>
+            <a:off x="640080" y="4530852"/>
+            <a:ext cx="10911535" cy="310896"/>
           </a:xfrm>
           <a:prstGeom prst="rect">
             <a:avLst/>
@@ -5315,81 +5175,11 @@
             <a:r>
               <a:rPr sz="2000" b="0" i="1">
                 <a:solidFill>
-                  <a:srgbClr val="8C8C8C"/>
-                </a:solidFill>
-                <a:latin typeface="Arial"/>
-              </a:rPr>
-              <a:t/>
-            </a:r>
-          </a:p>
-        </p:txBody>
-      </p:sp>
-      <p:sp>
-        <p:nvSpPr>
-          <p:cNvPr id="5" name="TextBox 4"/>
-          <p:cNvSpPr txBox="1"/>
-          <p:nvPr/>
-        </p:nvSpPr>
-        <p:spPr>
-          <a:xfrm>
-            <a:off x="594360" y="3529584"/>
-            <a:ext cx="11002975" cy="685800"/>
-          </a:xfrm>
-          <a:prstGeom prst="rect">
-            <a:avLst/>
-          </a:prstGeom>
-          <a:noFill/>
-        </p:spPr>
-        <p:txBody>
-          <a:bodyPr wrap="square">
-            <a:spAutoFit/>
-          </a:bodyPr>
-          <a:lstStyle/>
-          <a:p>
-            <a:pPr algn="ctr"/>
-            <a:r>
-              <a:rPr sz="4400" b="1" i="0">
-                <a:solidFill>
-                  <a:srgbClr val="FFFFFF"/>
-                </a:solidFill>
-                <a:latin typeface="Arial"/>
-              </a:rPr>
-              <a:t>唇にのせていま歌おう　主イエスよ</a:t>
-            </a:r>
-          </a:p>
-        </p:txBody>
-      </p:sp>
-      <p:sp>
-        <p:nvSpPr>
-          <p:cNvPr id="6" name="TextBox 5"/>
-          <p:cNvSpPr txBox="1"/>
-          <p:nvPr/>
-        </p:nvSpPr>
-        <p:spPr>
-          <a:xfrm>
-            <a:off x="594360" y="4251960"/>
-            <a:ext cx="11002975" cy="384048"/>
-          </a:xfrm>
-          <a:prstGeom prst="rect">
-            <a:avLst/>
-          </a:prstGeom>
-          <a:noFill/>
-        </p:spPr>
-        <p:txBody>
-          <a:bodyPr wrap="square">
-            <a:spAutoFit/>
-          </a:bodyPr>
-          <a:lstStyle/>
-          <a:p>
-            <a:pPr algn="ctr"/>
-            <a:r>
-              <a:rPr sz="2400" b="0" i="1">
-                <a:solidFill>
-                  <a:srgbClr val="B4B4B4"/>
-                </a:solidFill>
-                <a:latin typeface="Arial"/>
-              </a:rPr>
-              <a:t>kuchibiru ni nosete  ima utaou shu iesu yo</a:t>
+                  <a:srgbClr val="828282"/>
+                </a:solidFill>
+                <a:latin typeface="Arial"/>
+              </a:rPr>
+              <a:t>Jesus, um nome acima de todo nome</a:t>
             </a:r>
           </a:p>
         </p:txBody>
@@ -5402,8 +5192,8 @@
         </p:nvSpPr>
         <p:spPr>
           <a:xfrm>
-            <a:off x="594360" y="4672584"/>
-            <a:ext cx="11002975" cy="347472"/>
+            <a:off x="640080" y="4896612"/>
+            <a:ext cx="10911535" cy="310896"/>
           </a:xfrm>
           <a:prstGeom prst="rect">
             <a:avLst/>
@@ -5420,11 +5210,11 @@
             <a:r>
               <a:rPr sz="2000" b="0" i="1">
                 <a:solidFill>
-                  <a:srgbClr val="8C8C8C"/>
-                </a:solidFill>
-                <a:latin typeface="Arial"/>
-              </a:rPr>
-              <a:t/>
+                  <a:srgbClr val="828282"/>
+                </a:solidFill>
+                <a:latin typeface="Arial"/>
+              </a:rPr>
+              <a:t>Jesus, o único que pode nos salvar</a:t>
             </a:r>
           </a:p>
         </p:txBody>
@@ -5463,23 +5253,23 @@
         </p:nvSpPr>
         <p:spPr>
           <a:xfrm>
-            <a:off x="594360" y="1837944"/>
-            <a:ext cx="11002975" cy="685800"/>
-          </a:xfrm>
-          <a:prstGeom prst="rect">
-            <a:avLst/>
-          </a:prstGeom>
-          <a:noFill/>
-        </p:spPr>
-        <p:txBody>
-          <a:bodyPr wrap="square">
-            <a:spAutoFit/>
-          </a:bodyPr>
-          <a:lstStyle/>
-          <a:p>
-            <a:pPr algn="ctr"/>
-            <a:r>
-              <a:rPr sz="4400" b="1" i="0">
+            <a:off x="640080" y="1650492"/>
+            <a:ext cx="10911535" cy="731520"/>
+          </a:xfrm>
+          <a:prstGeom prst="rect">
+            <a:avLst/>
+          </a:prstGeom>
+          <a:noFill/>
+        </p:spPr>
+        <p:txBody>
+          <a:bodyPr wrap="square">
+            <a:spAutoFit/>
+          </a:bodyPr>
+          <a:lstStyle/>
+          <a:p>
+            <a:pPr algn="ctr"/>
+            <a:r>
+              <a:rPr sz="4800" b="1" i="0">
                 <a:solidFill>
                   <a:srgbClr val="FFFFFF"/>
                 </a:solidFill>
@@ -5498,25 +5288,25 @@
         </p:nvSpPr>
         <p:spPr>
           <a:xfrm>
-            <a:off x="594360" y="2560320"/>
-            <a:ext cx="11002975" cy="384048"/>
-          </a:xfrm>
-          <a:prstGeom prst="rect">
-            <a:avLst/>
-          </a:prstGeom>
-          <a:noFill/>
-        </p:spPr>
-        <p:txBody>
-          <a:bodyPr wrap="square">
-            <a:spAutoFit/>
-          </a:bodyPr>
-          <a:lstStyle/>
-          <a:p>
-            <a:pPr algn="ctr"/>
-            <a:r>
-              <a:rPr sz="1832" b="0" i="1">
-                <a:solidFill>
-                  <a:srgbClr val="B4B4B4"/>
+            <a:off x="640080" y="2418588"/>
+            <a:ext cx="10911535" cy="365760"/>
+          </a:xfrm>
+          <a:prstGeom prst="rect">
+            <a:avLst/>
+          </a:prstGeom>
+          <a:noFill/>
+        </p:spPr>
+        <p:txBody>
+          <a:bodyPr wrap="square">
+            <a:spAutoFit/>
+          </a:bodyPr>
+          <a:lstStyle/>
+          <a:p>
+            <a:pPr algn="ctr"/>
+            <a:r>
+              <a:rPr sz="2200" b="0" i="1">
+                <a:solidFill>
+                  <a:srgbClr val="AAAAAA"/>
                 </a:solidFill>
                 <a:latin typeface="Arial"/>
               </a:rPr>
@@ -5533,8 +5323,78 @@
         </p:nvSpPr>
         <p:spPr>
           <a:xfrm>
-            <a:off x="594360" y="2980944"/>
-            <a:ext cx="11002975" cy="347472"/>
+            <a:off x="640080" y="2985516"/>
+            <a:ext cx="10911535" cy="731520"/>
+          </a:xfrm>
+          <a:prstGeom prst="rect">
+            <a:avLst/>
+          </a:prstGeom>
+          <a:noFill/>
+        </p:spPr>
+        <p:txBody>
+          <a:bodyPr wrap="square">
+            <a:spAutoFit/>
+          </a:bodyPr>
+          <a:lstStyle/>
+          <a:p>
+            <a:pPr algn="ctr"/>
+            <a:r>
+              <a:rPr sz="4800" b="1" i="0">
+                <a:solidFill>
+                  <a:srgbClr val="FFFFFF"/>
+                </a:solidFill>
+                <a:latin typeface="Arial"/>
+              </a:rPr>
+              <a:t>愛　心にあふれ あなたを知る この愛こそあなた</a:t>
+            </a:r>
+          </a:p>
+        </p:txBody>
+      </p:sp>
+      <p:sp>
+        <p:nvSpPr>
+          <p:cNvPr id="5" name="TextBox 4"/>
+          <p:cNvSpPr txBox="1"/>
+          <p:nvPr/>
+        </p:nvSpPr>
+        <p:spPr>
+          <a:xfrm>
+            <a:off x="640080" y="3753612"/>
+            <a:ext cx="10911535" cy="365760"/>
+          </a:xfrm>
+          <a:prstGeom prst="rect">
+            <a:avLst/>
+          </a:prstGeom>
+          <a:noFill/>
+        </p:spPr>
+        <p:txBody>
+          <a:bodyPr wrap="square">
+            <a:spAutoFit/>
+          </a:bodyPr>
+          <a:lstStyle/>
+          <a:p>
+            <a:pPr algn="ctr"/>
+            <a:r>
+              <a:rPr sz="2300" b="0" i="1">
+                <a:solidFill>
+                  <a:srgbClr val="AAAAAA"/>
+                </a:solidFill>
+                <a:latin typeface="Arial"/>
+              </a:rPr>
+              <a:t>ai kokoro ni afure anata wo shiru  kono ai koso anata</a:t>
+            </a:r>
+          </a:p>
+        </p:txBody>
+      </p:sp>
+      <p:sp>
+        <p:nvSpPr>
+          <p:cNvPr id="6" name="TextBox 5"/>
+          <p:cNvSpPr txBox="1"/>
+          <p:nvPr/>
+        </p:nvSpPr>
+        <p:spPr>
+          <a:xfrm>
+            <a:off x="640080" y="4530852"/>
+            <a:ext cx="10911535" cy="310896"/>
           </a:xfrm>
           <a:prstGeom prst="rect">
             <a:avLst/>
@@ -5551,7 +5411,7 @@
             <a:r>
               <a:rPr sz="2000" b="0" i="1">
                 <a:solidFill>
-                  <a:srgbClr val="8C8C8C"/>
+                  <a:srgbClr val="828282"/>
                 </a:solidFill>
                 <a:latin typeface="Arial"/>
               </a:rPr>
@@ -5562,84 +5422,14 @@
       </p:sp>
       <p:sp>
         <p:nvSpPr>
-          <p:cNvPr id="5" name="TextBox 4"/>
-          <p:cNvSpPr txBox="1"/>
-          <p:nvPr/>
-        </p:nvSpPr>
-        <p:spPr>
-          <a:xfrm>
-            <a:off x="594360" y="3529584"/>
-            <a:ext cx="11002975" cy="685800"/>
-          </a:xfrm>
-          <a:prstGeom prst="rect">
-            <a:avLst/>
-          </a:prstGeom>
-          <a:noFill/>
-        </p:spPr>
-        <p:txBody>
-          <a:bodyPr wrap="square">
-            <a:spAutoFit/>
-          </a:bodyPr>
-          <a:lstStyle/>
-          <a:p>
-            <a:pPr algn="ctr"/>
-            <a:r>
-              <a:rPr sz="4400" b="1" i="0">
-                <a:solidFill>
-                  <a:srgbClr val="FFFFFF"/>
-                </a:solidFill>
-                <a:latin typeface="Arial"/>
-              </a:rPr>
-              <a:t>愛　心にあふれ あなたを知る この愛こそあなた</a:t>
-            </a:r>
-          </a:p>
-        </p:txBody>
-      </p:sp>
-      <p:sp>
-        <p:nvSpPr>
-          <p:cNvPr id="6" name="TextBox 5"/>
-          <p:cNvSpPr txBox="1"/>
-          <p:nvPr/>
-        </p:nvSpPr>
-        <p:spPr>
-          <a:xfrm>
-            <a:off x="594360" y="4251960"/>
-            <a:ext cx="11002975" cy="384048"/>
-          </a:xfrm>
-          <a:prstGeom prst="rect">
-            <a:avLst/>
-          </a:prstGeom>
-          <a:noFill/>
-        </p:spPr>
-        <p:txBody>
-          <a:bodyPr wrap="square">
-            <a:spAutoFit/>
-          </a:bodyPr>
-          <a:lstStyle/>
-          <a:p>
-            <a:pPr algn="ctr"/>
-            <a:r>
-              <a:rPr sz="1901" b="0" i="1">
-                <a:solidFill>
-                  <a:srgbClr val="B4B4B4"/>
-                </a:solidFill>
-                <a:latin typeface="Arial"/>
-              </a:rPr>
-              <a:t>ai kokoro ni afure anata wo shiru  kono ai koso anata</a:t>
-            </a:r>
-          </a:p>
-        </p:txBody>
-      </p:sp>
-      <p:sp>
-        <p:nvSpPr>
           <p:cNvPr id="7" name="TextBox 6"/>
           <p:cNvSpPr txBox="1"/>
           <p:nvPr/>
         </p:nvSpPr>
         <p:spPr>
           <a:xfrm>
-            <a:off x="594360" y="4672584"/>
-            <a:ext cx="11002975" cy="347472"/>
+            <a:off x="640080" y="4896612"/>
+            <a:ext cx="10911535" cy="310896"/>
           </a:xfrm>
           <a:prstGeom prst="rect">
             <a:avLst/>
@@ -5656,7 +5446,7 @@
             <a:r>
               <a:rPr sz="2000" b="0" i="1">
                 <a:solidFill>
-                  <a:srgbClr val="8C8C8C"/>
+                  <a:srgbClr val="828282"/>
                 </a:solidFill>
                 <a:latin typeface="Arial"/>
               </a:rPr>
@@ -5699,23 +5489,23 @@
         </p:nvSpPr>
         <p:spPr>
           <a:xfrm>
-            <a:off x="594360" y="2258568"/>
-            <a:ext cx="11002975" cy="685800"/>
-          </a:xfrm>
-          <a:prstGeom prst="rect">
-            <a:avLst/>
-          </a:prstGeom>
-          <a:noFill/>
-        </p:spPr>
-        <p:txBody>
-          <a:bodyPr wrap="square">
-            <a:spAutoFit/>
-          </a:bodyPr>
-          <a:lstStyle/>
-          <a:p>
-            <a:pPr algn="ctr"/>
-            <a:r>
-              <a:rPr sz="3520" b="1" i="0">
+            <a:off x="640080" y="2052828"/>
+            <a:ext cx="10911535" cy="731520"/>
+          </a:xfrm>
+          <a:prstGeom prst="rect">
+            <a:avLst/>
+          </a:prstGeom>
+          <a:noFill/>
+        </p:spPr>
+        <p:txBody>
+          <a:bodyPr wrap="square">
+            <a:spAutoFit/>
+          </a:bodyPr>
+          <a:lstStyle/>
+          <a:p>
+            <a:pPr algn="ctr"/>
+            <a:r>
+              <a:rPr sz="3800" b="1" i="0">
                 <a:solidFill>
                   <a:srgbClr val="FFFFFF"/>
                 </a:solidFill>
@@ -5734,99 +5524,29 @@
         </p:nvSpPr>
         <p:spPr>
           <a:xfrm>
-            <a:off x="594360" y="2980944"/>
-            <a:ext cx="11002975" cy="347472"/>
-          </a:xfrm>
-          <a:prstGeom prst="rect">
-            <a:avLst/>
-          </a:prstGeom>
-          <a:noFill/>
-        </p:spPr>
-        <p:txBody>
-          <a:bodyPr wrap="square">
-            <a:spAutoFit/>
-          </a:bodyPr>
-          <a:lstStyle/>
-          <a:p>
-            <a:pPr algn="ctr"/>
-            <a:r>
-              <a:rPr sz="2200" b="0" i="1">
-                <a:solidFill>
-                  <a:srgbClr val="8C8C8C"/>
-                </a:solidFill>
-                <a:latin typeface="Arial"/>
-              </a:rPr>
-              <a:t/>
-            </a:r>
-          </a:p>
-        </p:txBody>
-      </p:sp>
-      <p:sp>
-        <p:nvSpPr>
-          <p:cNvPr id="4" name="TextBox 3"/>
-          <p:cNvSpPr txBox="1"/>
-          <p:nvPr/>
-        </p:nvSpPr>
-        <p:spPr>
-          <a:xfrm>
-            <a:off x="594360" y="3529584"/>
-            <a:ext cx="11002975" cy="685800"/>
-          </a:xfrm>
-          <a:prstGeom prst="rect">
-            <a:avLst/>
-          </a:prstGeom>
-          <a:noFill/>
-        </p:spPr>
-        <p:txBody>
-          <a:bodyPr wrap="square">
-            <a:spAutoFit/>
-          </a:bodyPr>
-          <a:lstStyle/>
-          <a:p>
-            <a:pPr algn="ctr"/>
-            <a:r>
-              <a:rPr sz="3352" b="1" i="0">
+            <a:off x="640080" y="2985516"/>
+            <a:ext cx="10911535" cy="731520"/>
+          </a:xfrm>
+          <a:prstGeom prst="rect">
+            <a:avLst/>
+          </a:prstGeom>
+          <a:noFill/>
+        </p:spPr>
+        <p:txBody>
+          <a:bodyPr wrap="square">
+            <a:spAutoFit/>
+          </a:bodyPr>
+          <a:lstStyle/>
+          <a:p>
+            <a:pPr algn="ctr"/>
+            <a:r>
+              <a:rPr sz="3600" b="1" i="0">
                 <a:solidFill>
                   <a:srgbClr val="FFFFFF"/>
                 </a:solidFill>
                 <a:latin typeface="Arial"/>
               </a:rPr>
               <a:t>Digno de todo louvor que possamos oferecer</a:t>
-            </a:r>
-          </a:p>
-        </p:txBody>
-      </p:sp>
-      <p:sp>
-        <p:nvSpPr>
-          <p:cNvPr id="5" name="TextBox 4"/>
-          <p:cNvSpPr txBox="1"/>
-          <p:nvPr/>
-        </p:nvSpPr>
-        <p:spPr>
-          <a:xfrm>
-            <a:off x="594360" y="4251960"/>
-            <a:ext cx="11002975" cy="347472"/>
-          </a:xfrm>
-          <a:prstGeom prst="rect">
-            <a:avLst/>
-          </a:prstGeom>
-          <a:noFill/>
-        </p:spPr>
-        <p:txBody>
-          <a:bodyPr wrap="square">
-            <a:spAutoFit/>
-          </a:bodyPr>
-          <a:lstStyle/>
-          <a:p>
-            <a:pPr algn="ctr"/>
-            <a:r>
-              <a:rPr sz="2200" b="0" i="1">
-                <a:solidFill>
-                  <a:srgbClr val="8C8C8C"/>
-                </a:solidFill>
-                <a:latin typeface="Arial"/>
-              </a:rPr>
-              <a:t/>
             </a:r>
           </a:p>
         </p:txBody>
@@ -5865,23 +5585,23 @@
         </p:nvSpPr>
         <p:spPr>
           <a:xfrm>
-            <a:off x="594360" y="2258568"/>
-            <a:ext cx="11002975" cy="685800"/>
-          </a:xfrm>
-          <a:prstGeom prst="rect">
-            <a:avLst/>
-          </a:prstGeom>
-          <a:noFill/>
-        </p:spPr>
-        <p:txBody>
-          <a:bodyPr wrap="square">
-            <a:spAutoFit/>
-          </a:bodyPr>
-          <a:lstStyle/>
-          <a:p>
-            <a:pPr algn="ctr"/>
-            <a:r>
-              <a:rPr sz="3805" b="1" i="0">
+            <a:off x="640080" y="2052828"/>
+            <a:ext cx="10911535" cy="731520"/>
+          </a:xfrm>
+          <a:prstGeom prst="rect">
+            <a:avLst/>
+          </a:prstGeom>
+          <a:noFill/>
+        </p:spPr>
+        <p:txBody>
+          <a:bodyPr wrap="square">
+            <a:spAutoFit/>
+          </a:bodyPr>
+          <a:lstStyle/>
+          <a:p>
+            <a:pPr algn="ctr"/>
+            <a:r>
+              <a:rPr sz="4100" b="1" i="0">
                 <a:solidFill>
                   <a:srgbClr val="FFFFFF"/>
                 </a:solidFill>
@@ -5900,99 +5620,29 @@
         </p:nvSpPr>
         <p:spPr>
           <a:xfrm>
-            <a:off x="594360" y="2980944"/>
-            <a:ext cx="11002975" cy="347472"/>
-          </a:xfrm>
-          <a:prstGeom prst="rect">
-            <a:avLst/>
-          </a:prstGeom>
-          <a:noFill/>
-        </p:spPr>
-        <p:txBody>
-          <a:bodyPr wrap="square">
-            <a:spAutoFit/>
-          </a:bodyPr>
-          <a:lstStyle/>
-          <a:p>
-            <a:pPr algn="ctr"/>
-            <a:r>
-              <a:rPr sz="2200" b="0" i="1">
-                <a:solidFill>
-                  <a:srgbClr val="8C8C8C"/>
-                </a:solidFill>
-                <a:latin typeface="Arial"/>
-              </a:rPr>
-              <a:t/>
-            </a:r>
-          </a:p>
-        </p:txBody>
-      </p:sp>
-      <p:sp>
-        <p:nvSpPr>
-          <p:cNvPr id="4" name="TextBox 3"/>
-          <p:cNvSpPr txBox="1"/>
-          <p:nvPr/>
-        </p:nvSpPr>
-        <p:spPr>
-          <a:xfrm>
-            <a:off x="594360" y="3529584"/>
-            <a:ext cx="11002975" cy="685800"/>
-          </a:xfrm>
-          <a:prstGeom prst="rect">
-            <a:avLst/>
-          </a:prstGeom>
-          <a:noFill/>
-        </p:spPr>
-        <p:txBody>
-          <a:bodyPr wrap="square">
-            <a:spAutoFit/>
-          </a:bodyPr>
-          <a:lstStyle/>
-          <a:p>
-            <a:pPr algn="ctr"/>
-            <a:r>
-              <a:rPr sz="4400" b="1" i="0">
+            <a:off x="640080" y="2985516"/>
+            <a:ext cx="10911535" cy="731520"/>
+          </a:xfrm>
+          <a:prstGeom prst="rect">
+            <a:avLst/>
+          </a:prstGeom>
+          <a:noFill/>
+        </p:spPr>
+        <p:txBody>
+          <a:bodyPr wrap="square">
+            <a:spAutoFit/>
+          </a:bodyPr>
+          <a:lstStyle/>
+          <a:p>
+            <a:pPr algn="ctr"/>
+            <a:r>
+              <a:rPr sz="4800" b="1" i="0">
                 <a:solidFill>
                   <a:srgbClr val="FFFFFF"/>
                 </a:solidFill>
                 <a:latin typeface="Arial"/>
               </a:rPr>
               <a:t>Vivemos para Ti</a:t>
-            </a:r>
-          </a:p>
-        </p:txBody>
-      </p:sp>
-      <p:sp>
-        <p:nvSpPr>
-          <p:cNvPr id="5" name="TextBox 4"/>
-          <p:cNvSpPr txBox="1"/>
-          <p:nvPr/>
-        </p:nvSpPr>
-        <p:spPr>
-          <a:xfrm>
-            <a:off x="594360" y="4251960"/>
-            <a:ext cx="11002975" cy="347472"/>
-          </a:xfrm>
-          <a:prstGeom prst="rect">
-            <a:avLst/>
-          </a:prstGeom>
-          <a:noFill/>
-        </p:spPr>
-        <p:txBody>
-          <a:bodyPr wrap="square">
-            <a:spAutoFit/>
-          </a:bodyPr>
-          <a:lstStyle/>
-          <a:p>
-            <a:pPr algn="ctr"/>
-            <a:r>
-              <a:rPr sz="2200" b="0" i="1">
-                <a:solidFill>
-                  <a:srgbClr val="8C8C8C"/>
-                </a:solidFill>
-                <a:latin typeface="Arial"/>
-              </a:rPr>
-              <a:t/>
             </a:r>
           </a:p>
         </p:txBody>
@@ -6031,23 +5681,23 @@
         </p:nvSpPr>
         <p:spPr>
           <a:xfrm>
-            <a:off x="594360" y="2258568"/>
-            <a:ext cx="11002975" cy="685800"/>
-          </a:xfrm>
-          <a:prstGeom prst="rect">
-            <a:avLst/>
-          </a:prstGeom>
-          <a:noFill/>
-        </p:spPr>
-        <p:txBody>
-          <a:bodyPr wrap="square">
-            <a:spAutoFit/>
-          </a:bodyPr>
-          <a:lstStyle/>
-          <a:p>
-            <a:pPr algn="ctr"/>
-            <a:r>
-              <a:rPr sz="4266" b="1" i="0">
+            <a:off x="640080" y="2052828"/>
+            <a:ext cx="10911535" cy="731520"/>
+          </a:xfrm>
+          <a:prstGeom prst="rect">
+            <a:avLst/>
+          </a:prstGeom>
+          <a:noFill/>
+        </p:spPr>
+        <p:txBody>
+          <a:bodyPr wrap="square">
+            <a:spAutoFit/>
+          </a:bodyPr>
+          <a:lstStyle/>
+          <a:p>
+            <a:pPr algn="ctr"/>
+            <a:r>
+              <a:rPr sz="4600" b="1" i="0">
                 <a:solidFill>
                   <a:srgbClr val="FFFFFF"/>
                 </a:solidFill>
@@ -6066,99 +5716,29 @@
         </p:nvSpPr>
         <p:spPr>
           <a:xfrm>
-            <a:off x="594360" y="2980944"/>
-            <a:ext cx="11002975" cy="347472"/>
-          </a:xfrm>
-          <a:prstGeom prst="rect">
-            <a:avLst/>
-          </a:prstGeom>
-          <a:noFill/>
-        </p:spPr>
-        <p:txBody>
-          <a:bodyPr wrap="square">
-            <a:spAutoFit/>
-          </a:bodyPr>
-          <a:lstStyle/>
-          <a:p>
-            <a:pPr algn="ctr"/>
-            <a:r>
-              <a:rPr sz="2200" b="0" i="1">
-                <a:solidFill>
-                  <a:srgbClr val="8C8C8C"/>
-                </a:solidFill>
-                <a:latin typeface="Arial"/>
-              </a:rPr>
-              <a:t/>
-            </a:r>
-          </a:p>
-        </p:txBody>
-      </p:sp>
-      <p:sp>
-        <p:nvSpPr>
-          <p:cNvPr id="4" name="TextBox 3"/>
-          <p:cNvSpPr txBox="1"/>
-          <p:nvPr/>
-        </p:nvSpPr>
-        <p:spPr>
-          <a:xfrm>
-            <a:off x="594360" y="3529584"/>
-            <a:ext cx="11002975" cy="685800"/>
-          </a:xfrm>
-          <a:prstGeom prst="rect">
-            <a:avLst/>
-          </a:prstGeom>
-          <a:noFill/>
-        </p:spPr>
-        <p:txBody>
-          <a:bodyPr wrap="square">
-            <a:spAutoFit/>
-          </a:bodyPr>
-          <a:lstStyle/>
-          <a:p>
-            <a:pPr algn="ctr"/>
-            <a:r>
-              <a:rPr sz="4141" b="1" i="0">
+            <a:off x="640080" y="2985516"/>
+            <a:ext cx="10911535" cy="731520"/>
+          </a:xfrm>
+          <a:prstGeom prst="rect">
+            <a:avLst/>
+          </a:prstGeom>
+          <a:noFill/>
+        </p:spPr>
+        <p:txBody>
+          <a:bodyPr wrap="square">
+            <a:spAutoFit/>
+          </a:bodyPr>
+          <a:lstStyle/>
+          <a:p>
+            <a:pPr algn="ctr"/>
+            <a:r>
+              <a:rPr sz="4500" b="1" i="0">
                 <a:solidFill>
                   <a:srgbClr val="FFFFFF"/>
                 </a:solidFill>
                 <a:latin typeface="Arial"/>
               </a:rPr>
               <a:t>Jesus, o único que pode nos salvar</a:t>
-            </a:r>
-          </a:p>
-        </p:txBody>
-      </p:sp>
-      <p:sp>
-        <p:nvSpPr>
-          <p:cNvPr id="5" name="TextBox 4"/>
-          <p:cNvSpPr txBox="1"/>
-          <p:nvPr/>
-        </p:nvSpPr>
-        <p:spPr>
-          <a:xfrm>
-            <a:off x="594360" y="4251960"/>
-            <a:ext cx="11002975" cy="347472"/>
-          </a:xfrm>
-          <a:prstGeom prst="rect">
-            <a:avLst/>
-          </a:prstGeom>
-          <a:noFill/>
-        </p:spPr>
-        <p:txBody>
-          <a:bodyPr wrap="square">
-            <a:spAutoFit/>
-          </a:bodyPr>
-          <a:lstStyle/>
-          <a:p>
-            <a:pPr algn="ctr"/>
-            <a:r>
-              <a:rPr sz="2200" b="0" i="1">
-                <a:solidFill>
-                  <a:srgbClr val="8C8C8C"/>
-                </a:solidFill>
-                <a:latin typeface="Arial"/>
-              </a:rPr>
-              <a:t/>
             </a:r>
           </a:p>
         </p:txBody>
@@ -6197,23 +5777,23 @@
         </p:nvSpPr>
         <p:spPr>
           <a:xfrm>
-            <a:off x="594360" y="2258568"/>
-            <a:ext cx="11002975" cy="685800"/>
-          </a:xfrm>
-          <a:prstGeom prst="rect">
-            <a:avLst/>
-          </a:prstGeom>
-          <a:noFill/>
-        </p:spPr>
-        <p:txBody>
-          <a:bodyPr wrap="square">
-            <a:spAutoFit/>
-          </a:bodyPr>
-          <a:lstStyle/>
-          <a:p>
-            <a:pPr algn="ctr"/>
-            <a:r>
-              <a:rPr sz="3805" b="1" i="0">
+            <a:off x="640080" y="2052828"/>
+            <a:ext cx="10911535" cy="731520"/>
+          </a:xfrm>
+          <a:prstGeom prst="rect">
+            <a:avLst/>
+          </a:prstGeom>
+          <a:noFill/>
+        </p:spPr>
+        <p:txBody>
+          <a:bodyPr wrap="square">
+            <a:spAutoFit/>
+          </a:bodyPr>
+          <a:lstStyle/>
+          <a:p>
+            <a:pPr algn="ctr"/>
+            <a:r>
+              <a:rPr sz="4100" b="1" i="0">
                 <a:solidFill>
                   <a:srgbClr val="FFFFFF"/>
                 </a:solidFill>
@@ -6232,99 +5812,29 @@
         </p:nvSpPr>
         <p:spPr>
           <a:xfrm>
-            <a:off x="594360" y="2980944"/>
-            <a:ext cx="11002975" cy="347472"/>
-          </a:xfrm>
-          <a:prstGeom prst="rect">
-            <a:avLst/>
-          </a:prstGeom>
-          <a:noFill/>
-        </p:spPr>
-        <p:txBody>
-          <a:bodyPr wrap="square">
-            <a:spAutoFit/>
-          </a:bodyPr>
-          <a:lstStyle/>
-          <a:p>
-            <a:pPr algn="ctr"/>
-            <a:r>
-              <a:rPr sz="2200" b="0" i="1">
-                <a:solidFill>
-                  <a:srgbClr val="8C8C8C"/>
-                </a:solidFill>
-                <a:latin typeface="Arial"/>
-              </a:rPr>
-              <a:t/>
-            </a:r>
-          </a:p>
-        </p:txBody>
-      </p:sp>
-      <p:sp>
-        <p:nvSpPr>
-          <p:cNvPr id="4" name="TextBox 3"/>
-          <p:cNvSpPr txBox="1"/>
-          <p:nvPr/>
-        </p:nvSpPr>
-        <p:spPr>
-          <a:xfrm>
-            <a:off x="594360" y="3529584"/>
-            <a:ext cx="11002975" cy="685800"/>
-          </a:xfrm>
-          <a:prstGeom prst="rect">
-            <a:avLst/>
-          </a:prstGeom>
-          <a:noFill/>
-        </p:spPr>
-        <p:txBody>
-          <a:bodyPr wrap="square">
-            <a:spAutoFit/>
-          </a:bodyPr>
-          <a:lstStyle/>
-          <a:p>
-            <a:pPr algn="ctr"/>
-            <a:r>
-              <a:rPr sz="4400" b="1" i="0">
+            <a:off x="640080" y="2985516"/>
+            <a:ext cx="10911535" cy="731520"/>
+          </a:xfrm>
+          <a:prstGeom prst="rect">
+            <a:avLst/>
+          </a:prstGeom>
+          <a:noFill/>
+        </p:spPr>
+        <p:txBody>
+          <a:bodyPr wrap="square">
+            <a:spAutoFit/>
+          </a:bodyPr>
+          <a:lstStyle/>
+          <a:p>
+            <a:pPr algn="ctr"/>
+            <a:r>
+              <a:rPr sz="4800" b="1" i="0">
                 <a:solidFill>
                   <a:srgbClr val="FFFFFF"/>
                 </a:solidFill>
                 <a:latin typeface="Arial"/>
               </a:rPr>
               <a:t>Vivemos para Ti</a:t>
-            </a:r>
-          </a:p>
-        </p:txBody>
-      </p:sp>
-      <p:sp>
-        <p:nvSpPr>
-          <p:cNvPr id="5" name="TextBox 4"/>
-          <p:cNvSpPr txBox="1"/>
-          <p:nvPr/>
-        </p:nvSpPr>
-        <p:spPr>
-          <a:xfrm>
-            <a:off x="594360" y="4251960"/>
-            <a:ext cx="11002975" cy="347472"/>
-          </a:xfrm>
-          <a:prstGeom prst="rect">
-            <a:avLst/>
-          </a:prstGeom>
-          <a:noFill/>
-        </p:spPr>
-        <p:txBody>
-          <a:bodyPr wrap="square">
-            <a:spAutoFit/>
-          </a:bodyPr>
-          <a:lstStyle/>
-          <a:p>
-            <a:pPr algn="ctr"/>
-            <a:r>
-              <a:rPr sz="2200" b="0" i="1">
-                <a:solidFill>
-                  <a:srgbClr val="8C8C8C"/>
-                </a:solidFill>
-                <a:latin typeface="Arial"/>
-              </a:rPr>
-              <a:t/>
             </a:r>
           </a:p>
         </p:txBody>
@@ -6363,23 +5873,23 @@
         </p:nvSpPr>
         <p:spPr>
           <a:xfrm>
-            <a:off x="594360" y="2258568"/>
-            <a:ext cx="11002975" cy="685800"/>
-          </a:xfrm>
-          <a:prstGeom prst="rect">
-            <a:avLst/>
-          </a:prstGeom>
-          <a:noFill/>
-        </p:spPr>
-        <p:txBody>
-          <a:bodyPr wrap="square">
-            <a:spAutoFit/>
-          </a:bodyPr>
-          <a:lstStyle/>
-          <a:p>
-            <a:pPr algn="ctr"/>
-            <a:r>
-              <a:rPr sz="4400" b="1" i="0">
+            <a:off x="640080" y="2052828"/>
+            <a:ext cx="10911535" cy="731520"/>
+          </a:xfrm>
+          <a:prstGeom prst="rect">
+            <a:avLst/>
+          </a:prstGeom>
+          <a:noFill/>
+        </p:spPr>
+        <p:txBody>
+          <a:bodyPr wrap="square">
+            <a:spAutoFit/>
+          </a:bodyPr>
+          <a:lstStyle/>
+          <a:p>
+            <a:pPr algn="ctr"/>
+            <a:r>
+              <a:rPr sz="4800" b="1" i="0">
                 <a:solidFill>
                   <a:srgbClr val="FFFFFF"/>
                 </a:solidFill>
@@ -6398,25 +5908,60 @@
         </p:nvSpPr>
         <p:spPr>
           <a:xfrm>
-            <a:off x="594360" y="2980944"/>
-            <a:ext cx="11002975" cy="347472"/>
-          </a:xfrm>
-          <a:prstGeom prst="rect">
-            <a:avLst/>
-          </a:prstGeom>
-          <a:noFill/>
-        </p:spPr>
-        <p:txBody>
-          <a:bodyPr wrap="square">
-            <a:spAutoFit/>
-          </a:bodyPr>
-          <a:lstStyle/>
-          <a:p>
-            <a:pPr algn="ctr"/>
-            <a:r>
-              <a:rPr sz="2200" b="0" i="1">
-                <a:solidFill>
-                  <a:srgbClr val="8C8C8C"/>
+            <a:off x="640080" y="2985516"/>
+            <a:ext cx="10911535" cy="731520"/>
+          </a:xfrm>
+          <a:prstGeom prst="rect">
+            <a:avLst/>
+          </a:prstGeom>
+          <a:noFill/>
+        </p:spPr>
+        <p:txBody>
+          <a:bodyPr wrap="square">
+            <a:spAutoFit/>
+          </a:bodyPr>
+          <a:lstStyle/>
+          <a:p>
+            <a:pPr algn="ctr"/>
+            <a:r>
+              <a:rPr sz="4800" b="1" i="0">
+                <a:solidFill>
+                  <a:srgbClr val="FFFFFF"/>
+                </a:solidFill>
+                <a:latin typeface="Arial"/>
+              </a:rPr>
+              <a:t>Não há outro além de Ti</a:t>
+            </a:r>
+          </a:p>
+        </p:txBody>
+      </p:sp>
+      <p:sp>
+        <p:nvSpPr>
+          <p:cNvPr id="4" name="TextBox 3"/>
+          <p:cNvSpPr txBox="1"/>
+          <p:nvPr/>
+        </p:nvSpPr>
+        <p:spPr>
+          <a:xfrm>
+            <a:off x="640080" y="4128516"/>
+            <a:ext cx="10911535" cy="310896"/>
+          </a:xfrm>
+          <a:prstGeom prst="rect">
+            <a:avLst/>
+          </a:prstGeom>
+          <a:noFill/>
+        </p:spPr>
+        <p:txBody>
+          <a:bodyPr wrap="square">
+            <a:spAutoFit/>
+          </a:bodyPr>
+          <a:lstStyle/>
+          <a:p>
+            <a:pPr algn="ctr"/>
+            <a:r>
+              <a:rPr sz="2000" b="0" i="0">
+                <a:solidFill>
+                  <a:srgbClr val="828282"/>
                 </a:solidFill>
                 <a:latin typeface="Arial"/>
               </a:rPr>
@@ -6427,66 +5972,31 @@
       </p:sp>
       <p:sp>
         <p:nvSpPr>
-          <p:cNvPr id="4" name="TextBox 3"/>
-          <p:cNvSpPr txBox="1"/>
-          <p:nvPr/>
-        </p:nvSpPr>
-        <p:spPr>
-          <a:xfrm>
-            <a:off x="594360" y="3529584"/>
-            <a:ext cx="11002975" cy="685800"/>
-          </a:xfrm>
-          <a:prstGeom prst="rect">
-            <a:avLst/>
-          </a:prstGeom>
-          <a:noFill/>
-        </p:spPr>
-        <p:txBody>
-          <a:bodyPr wrap="square">
-            <a:spAutoFit/>
-          </a:bodyPr>
-          <a:lstStyle/>
-          <a:p>
-            <a:pPr algn="ctr"/>
-            <a:r>
-              <a:rPr sz="4400" b="1" i="0">
-                <a:solidFill>
-                  <a:srgbClr val="FFFFFF"/>
-                </a:solidFill>
-                <a:latin typeface="Arial"/>
-              </a:rPr>
-              <a:t>Não há outro além de Ti</a:t>
-            </a:r>
-          </a:p>
-        </p:txBody>
-      </p:sp>
-      <p:sp>
-        <p:nvSpPr>
           <p:cNvPr id="5" name="TextBox 4"/>
           <p:cNvSpPr txBox="1"/>
           <p:nvPr/>
         </p:nvSpPr>
         <p:spPr>
           <a:xfrm>
-            <a:off x="594360" y="4251960"/>
-            <a:ext cx="11002975" cy="347472"/>
-          </a:xfrm>
-          <a:prstGeom prst="rect">
-            <a:avLst/>
-          </a:prstGeom>
-          <a:noFill/>
-        </p:spPr>
-        <p:txBody>
-          <a:bodyPr wrap="square">
-            <a:spAutoFit/>
-          </a:bodyPr>
-          <a:lstStyle/>
-          <a:p>
-            <a:pPr algn="ctr"/>
-            <a:r>
-              <a:rPr sz="2200" b="0" i="1">
-                <a:solidFill>
-                  <a:srgbClr val="8C8C8C"/>
+            <a:off x="640080" y="4494276"/>
+            <a:ext cx="10911535" cy="310896"/>
+          </a:xfrm>
+          <a:prstGeom prst="rect">
+            <a:avLst/>
+          </a:prstGeom>
+          <a:noFill/>
+        </p:spPr>
+        <p:txBody>
+          <a:bodyPr wrap="square">
+            <a:spAutoFit/>
+          </a:bodyPr>
+          <a:lstStyle/>
+          <a:p>
+            <a:pPr algn="ctr"/>
+            <a:r>
+              <a:rPr sz="2000" b="0" i="0">
+                <a:solidFill>
+                  <a:srgbClr val="828282"/>
                 </a:solidFill>
                 <a:latin typeface="Arial"/>
               </a:rPr>

--- a/output_pptx/Build_My_Life.pptx
+++ b/output_pptx/Build_My_Life.pptx
@@ -3585,6 +3585,76 @@
           </a:p>
         </p:txBody>
       </p:sp>
+      <p:sp>
+        <p:nvSpPr>
+          <p:cNvPr id="4" name="TextBox 3"/>
+          <p:cNvSpPr txBox="1"/>
+          <p:nvPr/>
+        </p:nvSpPr>
+        <p:spPr>
+          <a:xfrm>
+            <a:off x="640080" y="4128516"/>
+            <a:ext cx="10911535" cy="310896"/>
+          </a:xfrm>
+          <a:prstGeom prst="rect">
+            <a:avLst/>
+          </a:prstGeom>
+          <a:noFill/>
+        </p:spPr>
+        <p:txBody>
+          <a:bodyPr wrap="square">
+            <a:spAutoFit/>
+          </a:bodyPr>
+          <a:lstStyle/>
+          <a:p>
+            <a:pPr algn="ctr"/>
+            <a:r>
+              <a:rPr sz="2000" b="0" i="0">
+                <a:solidFill>
+                  <a:srgbClr val="828282"/>
+                </a:solidFill>
+                <a:latin typeface="Arial"/>
+              </a:rPr>
+              <a:t>あなたの心で私を満たしてください</a:t>
+            </a:r>
+          </a:p>
+        </p:txBody>
+      </p:sp>
+      <p:sp>
+        <p:nvSpPr>
+          <p:cNvPr id="5" name="TextBox 4"/>
+          <p:cNvSpPr txBox="1"/>
+          <p:nvPr/>
+        </p:nvSpPr>
+        <p:spPr>
+          <a:xfrm>
+            <a:off x="640080" y="4494276"/>
+            <a:ext cx="10911535" cy="310896"/>
+          </a:xfrm>
+          <a:prstGeom prst="rect">
+            <a:avLst/>
+          </a:prstGeom>
+          <a:noFill/>
+        </p:spPr>
+        <p:txBody>
+          <a:bodyPr wrap="square">
+            <a:spAutoFit/>
+          </a:bodyPr>
+          <a:lstStyle/>
+          <a:p>
+            <a:pPr algn="ctr"/>
+            <a:r>
+              <a:rPr sz="2000" b="0" i="0">
+                <a:solidFill>
+                  <a:srgbClr val="828282"/>
+                </a:solidFill>
+                <a:latin typeface="Arial"/>
+              </a:rPr>
+              <a:t>あなたの愛で私を導いてください</a:t>
+            </a:r>
+          </a:p>
+        </p:txBody>
+      </p:sp>
     </p:spTree>
   </p:cSld>
   <p:clrMapOvr>
@@ -3847,6 +3917,76 @@
           </a:p>
         </p:txBody>
       </p:sp>
+      <p:sp>
+        <p:nvSpPr>
+          <p:cNvPr id="4" name="TextBox 3"/>
+          <p:cNvSpPr txBox="1"/>
+          <p:nvPr/>
+        </p:nvSpPr>
+        <p:spPr>
+          <a:xfrm>
+            <a:off x="640080" y="4128516"/>
+            <a:ext cx="10911535" cy="310896"/>
+          </a:xfrm>
+          <a:prstGeom prst="rect">
+            <a:avLst/>
+          </a:prstGeom>
+          <a:noFill/>
+        </p:spPr>
+        <p:txBody>
+          <a:bodyPr wrap="square">
+            <a:spAutoFit/>
+          </a:bodyPr>
+          <a:lstStyle/>
+          <a:p>
+            <a:pPr algn="ctr"/>
+            <a:r>
+              <a:rPr sz="2000" b="0" i="0">
+                <a:solidFill>
+                  <a:srgbClr val="828282"/>
+                </a:solidFill>
+                <a:latin typeface="Arial"/>
+              </a:rPr>
+              <a:t>主よ、私はあなたの上に人生を築きます</a:t>
+            </a:r>
+          </a:p>
+        </p:txBody>
+      </p:sp>
+      <p:sp>
+        <p:nvSpPr>
+          <p:cNvPr id="5" name="TextBox 4"/>
+          <p:cNvSpPr txBox="1"/>
+          <p:nvPr/>
+        </p:nvSpPr>
+        <p:spPr>
+          <a:xfrm>
+            <a:off x="640080" y="4494276"/>
+            <a:ext cx="10911535" cy="310896"/>
+          </a:xfrm>
+          <a:prstGeom prst="rect">
+            <a:avLst/>
+          </a:prstGeom>
+          <a:noFill/>
+        </p:spPr>
+        <p:txBody>
+          <a:bodyPr wrap="square">
+            <a:spAutoFit/>
+          </a:bodyPr>
+          <a:lstStyle/>
+          <a:p>
+            <a:pPr algn="ctr"/>
+            <a:r>
+              <a:rPr sz="2000" b="0" i="0">
+                <a:solidFill>
+                  <a:srgbClr val="828282"/>
+                </a:solidFill>
+                <a:latin typeface="Arial"/>
+              </a:rPr>
+              <a:t>ただあなたのみに</a:t>
+            </a:r>
+          </a:p>
+        </p:txBody>
+      </p:sp>
     </p:spTree>
   </p:cSld>
   <p:clrMapOvr>
@@ -4511,6 +4651,76 @@
           </a:p>
         </p:txBody>
       </p:sp>
+      <p:sp>
+        <p:nvSpPr>
+          <p:cNvPr id="4" name="TextBox 3"/>
+          <p:cNvSpPr txBox="1"/>
+          <p:nvPr/>
+        </p:nvSpPr>
+        <p:spPr>
+          <a:xfrm>
+            <a:off x="640080" y="4128516"/>
+            <a:ext cx="10911535" cy="310896"/>
+          </a:xfrm>
+          <a:prstGeom prst="rect">
+            <a:avLst/>
+          </a:prstGeom>
+          <a:noFill/>
+        </p:spPr>
+        <p:txBody>
+          <a:bodyPr wrap="square">
+            <a:spAutoFit/>
+          </a:bodyPr>
+          <a:lstStyle/>
+          <a:p>
+            <a:pPr algn="ctr"/>
+            <a:r>
+              <a:rPr sz="2000" b="0" i="0">
+                <a:solidFill>
+                  <a:srgbClr val="828282"/>
+                </a:solidFill>
+                <a:latin typeface="Arial"/>
+              </a:rPr>
+              <a:t>あなたの心で私を満たしてください</a:t>
+            </a:r>
+          </a:p>
+        </p:txBody>
+      </p:sp>
+      <p:sp>
+        <p:nvSpPr>
+          <p:cNvPr id="5" name="TextBox 4"/>
+          <p:cNvSpPr txBox="1"/>
+          <p:nvPr/>
+        </p:nvSpPr>
+        <p:spPr>
+          <a:xfrm>
+            <a:off x="640080" y="4494276"/>
+            <a:ext cx="10911535" cy="310896"/>
+          </a:xfrm>
+          <a:prstGeom prst="rect">
+            <a:avLst/>
+          </a:prstGeom>
+          <a:noFill/>
+        </p:spPr>
+        <p:txBody>
+          <a:bodyPr wrap="square">
+            <a:spAutoFit/>
+          </a:bodyPr>
+          <a:lstStyle/>
+          <a:p>
+            <a:pPr algn="ctr"/>
+            <a:r>
+              <a:rPr sz="2000" b="0" i="0">
+                <a:solidFill>
+                  <a:srgbClr val="828282"/>
+                </a:solidFill>
+                <a:latin typeface="Arial"/>
+              </a:rPr>
+              <a:t>あなたの愛で私を導いてください</a:t>
+            </a:r>
+          </a:p>
+        </p:txBody>
+      </p:sp>
     </p:spTree>
   </p:cSld>
   <p:clrMapOvr>
@@ -5551,6 +5761,76 @@
           </a:p>
         </p:txBody>
       </p:sp>
+      <p:sp>
+        <p:nvSpPr>
+          <p:cNvPr id="4" name="TextBox 3"/>
+          <p:cNvSpPr txBox="1"/>
+          <p:nvPr/>
+        </p:nvSpPr>
+        <p:spPr>
+          <a:xfrm>
+            <a:off x="640080" y="4128516"/>
+            <a:ext cx="10911535" cy="310896"/>
+          </a:xfrm>
+          <a:prstGeom prst="rect">
+            <a:avLst/>
+          </a:prstGeom>
+          <a:noFill/>
+        </p:spPr>
+        <p:txBody>
+          <a:bodyPr wrap="square">
+            <a:spAutoFit/>
+          </a:bodyPr>
+          <a:lstStyle/>
+          <a:p>
+            <a:pPr algn="ctr"/>
+            <a:r>
+              <a:rPr sz="2000" b="0" i="0">
+                <a:solidFill>
+                  <a:srgbClr val="828282"/>
+                </a:solidFill>
+                <a:latin typeface="Arial"/>
+              </a:rPr>
+              <a:t>あらゆる歌の価値があります</a:t>
+            </a:r>
+          </a:p>
+        </p:txBody>
+      </p:sp>
+      <p:sp>
+        <p:nvSpPr>
+          <p:cNvPr id="5" name="TextBox 4"/>
+          <p:cNvSpPr txBox="1"/>
+          <p:nvPr/>
+        </p:nvSpPr>
+        <p:spPr>
+          <a:xfrm>
+            <a:off x="640080" y="4494276"/>
+            <a:ext cx="10911535" cy="310896"/>
+          </a:xfrm>
+          <a:prstGeom prst="rect">
+            <a:avLst/>
+          </a:prstGeom>
+          <a:noFill/>
+        </p:spPr>
+        <p:txBody>
+          <a:bodyPr wrap="square">
+            <a:spAutoFit/>
+          </a:bodyPr>
+          <a:lstStyle/>
+          <a:p>
+            <a:pPr algn="ctr"/>
+            <a:r>
+              <a:rPr sz="2000" b="0" i="0">
+                <a:solidFill>
+                  <a:srgbClr val="828282"/>
+                </a:solidFill>
+                <a:latin typeface="Arial"/>
+              </a:rPr>
+              <a:t>あらゆる賛美を受けるに値します</a:t>
+            </a:r>
+          </a:p>
+        </p:txBody>
+      </p:sp>
     </p:spTree>
   </p:cSld>
   <p:clrMapOvr>
@@ -5647,6 +5927,76 @@
           </a:p>
         </p:txBody>
       </p:sp>
+      <p:sp>
+        <p:nvSpPr>
+          <p:cNvPr id="4" name="TextBox 3"/>
+          <p:cNvSpPr txBox="1"/>
+          <p:nvPr/>
+        </p:nvSpPr>
+        <p:spPr>
+          <a:xfrm>
+            <a:off x="640080" y="4128516"/>
+            <a:ext cx="10911535" cy="310896"/>
+          </a:xfrm>
+          <a:prstGeom prst="rect">
+            <a:avLst/>
+          </a:prstGeom>
+          <a:noFill/>
+        </p:spPr>
+        <p:txBody>
+          <a:bodyPr wrap="square">
+            <a:spAutoFit/>
+          </a:bodyPr>
+          <a:lstStyle/>
+          <a:p>
+            <a:pPr algn="ctr"/>
+            <a:r>
+              <a:rPr sz="2000" b="0" i="0">
+                <a:solidFill>
+                  <a:srgbClr val="828282"/>
+                </a:solidFill>
+                <a:latin typeface="Arial"/>
+              </a:rPr>
+              <a:t>すべての息吹を捧げるに相応しい方</a:t>
+            </a:r>
+          </a:p>
+        </p:txBody>
+      </p:sp>
+      <p:sp>
+        <p:nvSpPr>
+          <p:cNvPr id="5" name="TextBox 4"/>
+          <p:cNvSpPr txBox="1"/>
+          <p:nvPr/>
+        </p:nvSpPr>
+        <p:spPr>
+          <a:xfrm>
+            <a:off x="640080" y="4494276"/>
+            <a:ext cx="10911535" cy="310896"/>
+          </a:xfrm>
+          <a:prstGeom prst="rect">
+            <a:avLst/>
+          </a:prstGeom>
+          <a:noFill/>
+        </p:spPr>
+        <p:txBody>
+          <a:bodyPr wrap="square">
+            <a:spAutoFit/>
+          </a:bodyPr>
+          <a:lstStyle/>
+          <a:p>
+            <a:pPr algn="ctr"/>
+            <a:r>
+              <a:rPr sz="2000" b="0" i="0">
+                <a:solidFill>
+                  <a:srgbClr val="828282"/>
+                </a:solidFill>
+                <a:latin typeface="Arial"/>
+              </a:rPr>
+              <a:t>私たちはあなたのために生きます</a:t>
+            </a:r>
+          </a:p>
+        </p:txBody>
+      </p:sp>
     </p:spTree>
   </p:cSld>
   <p:clrMapOvr>
@@ -5743,6 +6093,76 @@
           </a:p>
         </p:txBody>
       </p:sp>
+      <p:sp>
+        <p:nvSpPr>
+          <p:cNvPr id="4" name="TextBox 3"/>
+          <p:cNvSpPr txBox="1"/>
+          <p:nvPr/>
+        </p:nvSpPr>
+        <p:spPr>
+          <a:xfrm>
+            <a:off x="640080" y="4128516"/>
+            <a:ext cx="10911535" cy="310896"/>
+          </a:xfrm>
+          <a:prstGeom prst="rect">
+            <a:avLst/>
+          </a:prstGeom>
+          <a:noFill/>
+        </p:spPr>
+        <p:txBody>
+          <a:bodyPr wrap="square">
+            <a:spAutoFit/>
+          </a:bodyPr>
+          <a:lstStyle/>
+          <a:p>
+            <a:pPr algn="ctr"/>
+            <a:r>
+              <a:rPr sz="2000" b="0" i="0">
+                <a:solidFill>
+                  <a:srgbClr val="828282"/>
+                </a:solidFill>
+                <a:latin typeface="Arial"/>
+              </a:rPr>
+              <a:t>イエスよ、すべての名前より高い名前</a:t>
+            </a:r>
+          </a:p>
+        </p:txBody>
+      </p:sp>
+      <p:sp>
+        <p:nvSpPr>
+          <p:cNvPr id="5" name="TextBox 4"/>
+          <p:cNvSpPr txBox="1"/>
+          <p:nvPr/>
+        </p:nvSpPr>
+        <p:spPr>
+          <a:xfrm>
+            <a:off x="640080" y="4494276"/>
+            <a:ext cx="10911535" cy="310896"/>
+          </a:xfrm>
+          <a:prstGeom prst="rect">
+            <a:avLst/>
+          </a:prstGeom>
+          <a:noFill/>
+        </p:spPr>
+        <p:txBody>
+          <a:bodyPr wrap="square">
+            <a:spAutoFit/>
+          </a:bodyPr>
+          <a:lstStyle/>
+          <a:p>
+            <a:pPr algn="ctr"/>
+            <a:r>
+              <a:rPr sz="2000" b="0" i="0">
+                <a:solidFill>
+                  <a:srgbClr val="828282"/>
+                </a:solidFill>
+                <a:latin typeface="Arial"/>
+              </a:rPr>
+              <a:t>イエスよ、ただあなただけが私たちを救える</a:t>
+            </a:r>
+          </a:p>
+        </p:txBody>
+      </p:sp>
     </p:spTree>
   </p:cSld>
   <p:clrMapOvr>
@@ -5835,6 +6255,76 @@
                 <a:latin typeface="Arial"/>
               </a:rPr>
               <a:t>Vivemos para Ti</a:t>
+            </a:r>
+          </a:p>
+        </p:txBody>
+      </p:sp>
+      <p:sp>
+        <p:nvSpPr>
+          <p:cNvPr id="4" name="TextBox 3"/>
+          <p:cNvSpPr txBox="1"/>
+          <p:nvPr/>
+        </p:nvSpPr>
+        <p:spPr>
+          <a:xfrm>
+            <a:off x="640080" y="4128516"/>
+            <a:ext cx="10911535" cy="310896"/>
+          </a:xfrm>
+          <a:prstGeom prst="rect">
+            <a:avLst/>
+          </a:prstGeom>
+          <a:noFill/>
+        </p:spPr>
+        <p:txBody>
+          <a:bodyPr wrap="square">
+            <a:spAutoFit/>
+          </a:bodyPr>
+          <a:lstStyle/>
+          <a:p>
+            <a:pPr algn="ctr"/>
+            <a:r>
+              <a:rPr sz="2000" b="0" i="0">
+                <a:solidFill>
+                  <a:srgbClr val="828282"/>
+                </a:solidFill>
+                <a:latin typeface="Arial"/>
+              </a:rPr>
+              <a:t>すべての息吹を捧げるに相応しい方</a:t>
+            </a:r>
+          </a:p>
+        </p:txBody>
+      </p:sp>
+      <p:sp>
+        <p:nvSpPr>
+          <p:cNvPr id="5" name="TextBox 4"/>
+          <p:cNvSpPr txBox="1"/>
+          <p:nvPr/>
+        </p:nvSpPr>
+        <p:spPr>
+          <a:xfrm>
+            <a:off x="640080" y="4494276"/>
+            <a:ext cx="10911535" cy="310896"/>
+          </a:xfrm>
+          <a:prstGeom prst="rect">
+            <a:avLst/>
+          </a:prstGeom>
+          <a:noFill/>
+        </p:spPr>
+        <p:txBody>
+          <a:bodyPr wrap="square">
+            <a:spAutoFit/>
+          </a:bodyPr>
+          <a:lstStyle/>
+          <a:p>
+            <a:pPr algn="ctr"/>
+            <a:r>
+              <a:rPr sz="2000" b="0" i="0">
+                <a:solidFill>
+                  <a:srgbClr val="828282"/>
+                </a:solidFill>
+                <a:latin typeface="Arial"/>
+              </a:rPr>
+              <a:t>私たちはあなたのために生きます</a:t>
             </a:r>
           </a:p>
         </p:txBody>
